--- a/McCain_OrderStatus_CTO_Deck_1.pptx
+++ b/McCain_OrderStatus_CTO_Deck_1.pptx
@@ -5,7 +5,7 @@
     <p:sldMasterId id="2147483648" r:id="rId1"/>
   </p:sldMasterIdLst>
   <p:notesMasterIdLst>
-    <p:notesMasterId r:id="rId12"/>
+    <p:notesMasterId r:id="rId14"/>
   </p:notesMasterIdLst>
   <p:sldIdLst>
     <p:sldId id="256" r:id="rId2"/>
@@ -13,11 +13,13 @@
     <p:sldId id="258" r:id="rId4"/>
     <p:sldId id="259" r:id="rId5"/>
     <p:sldId id="260" r:id="rId6"/>
-    <p:sldId id="261" r:id="rId7"/>
-    <p:sldId id="262" r:id="rId8"/>
-    <p:sldId id="263" r:id="rId9"/>
-    <p:sldId id="264" r:id="rId10"/>
-    <p:sldId id="265" r:id="rId11"/>
+    <p:sldId id="266" r:id="rId7"/>
+    <p:sldId id="267" r:id="rId8"/>
+    <p:sldId id="261" r:id="rId9"/>
+    <p:sldId id="262" r:id="rId10"/>
+    <p:sldId id="263" r:id="rId11"/>
+    <p:sldId id="264" r:id="rId12"/>
+    <p:sldId id="265" r:id="rId13"/>
   </p:sldIdLst>
   <p:sldSz cx="12192000" cy="6858000"/>
   <p:notesSz cx="6858000" cy="12192000"/>
@@ -414,6 +416,174 @@
 </p:notes>
 </file>
 
+<file path=ppt/notesSlides/notesSlide11.xml><?xml version="1.0" encoding="utf-8"?>
+<p:notes xmlns:a="http://schemas.openxmlformats.org/drawingml/2006/main" xmlns:r="http://schemas.openxmlformats.org/officeDocument/2006/relationships" xmlns:p="http://schemas.openxmlformats.org/presentationml/2006/main">
+  <p:cSld>
+    <p:spTree>
+      <p:nvGrpSpPr>
+        <p:cNvPr id="1" name=""/>
+        <p:cNvGrpSpPr/>
+        <p:nvPr/>
+      </p:nvGrpSpPr>
+      <p:grpSpPr>
+        <a:xfrm>
+          <a:off x="0" y="0"/>
+          <a:ext cx="0" cy="0"/>
+          <a:chOff x="0" y="0"/>
+          <a:chExt cx="0" cy="0"/>
+        </a:xfrm>
+      </p:grpSpPr>
+      <p:sp>
+        <p:nvSpPr>
+          <p:cNvPr id="2" name="Slide Image Placeholder 1"/>
+          <p:cNvSpPr>
+            <a:spLocks noGrp="1" noRot="1" noChangeAspect="1"/>
+          </p:cNvSpPr>
+          <p:nvPr>
+            <p:ph type="sldImg"/>
+          </p:nvPr>
+        </p:nvSpPr>
+        <p:spPr/>
+      </p:sp>
+      <p:sp>
+        <p:nvSpPr>
+          <p:cNvPr id="3" name="Notes Placeholder 2"/>
+          <p:cNvSpPr>
+            <a:spLocks noGrp="1"/>
+          </p:cNvSpPr>
+          <p:nvPr>
+            <p:ph type="body" idx="1"/>
+          </p:nvPr>
+        </p:nvSpPr>
+        <p:spPr/>
+        <p:txBody>
+          <a:bodyPr/>
+          <a:lstStyle/>
+          <a:p>
+            <a:endParaRPr lang="en-US" dirty="0"/>
+          </a:p>
+        </p:txBody>
+      </p:sp>
+      <p:sp>
+        <p:nvSpPr>
+          <p:cNvPr id="4" name="Slide Number Placeholder 3"/>
+          <p:cNvSpPr>
+            <a:spLocks noGrp="1"/>
+          </p:cNvSpPr>
+          <p:nvPr>
+            <p:ph type="sldNum" sz="quarter" idx="10"/>
+          </p:nvPr>
+        </p:nvSpPr>
+        <p:spPr/>
+        <p:txBody>
+          <a:bodyPr/>
+          <a:lstStyle/>
+          <a:p>
+            <a:fld id="{F7021451-1387-4CA6-816F-3879F97B5CBC}" type="slidenum">
+              <a:rPr lang="en-US"/>
+              <a:t>11</a:t>
+            </a:fld>
+            <a:endParaRPr lang="en-US"/>
+          </a:p>
+        </p:txBody>
+      </p:sp>
+    </p:spTree>
+    <p:extLst>
+      <p:ext uri="{BB962C8B-B14F-4D97-AF65-F5344CB8AC3E}">
+        <p14:creationId xmlns:p14="http://schemas.microsoft.com/office/powerpoint/2010/main" val="1024086991"/>
+      </p:ext>
+    </p:extLst>
+  </p:cSld>
+  <p:clrMapOvr>
+    <a:masterClrMapping/>
+  </p:clrMapOvr>
+</p:notes>
+</file>
+
+<file path=ppt/notesSlides/notesSlide12.xml><?xml version="1.0" encoding="utf-8"?>
+<p:notes xmlns:a="http://schemas.openxmlformats.org/drawingml/2006/main" xmlns:r="http://schemas.openxmlformats.org/officeDocument/2006/relationships" xmlns:p="http://schemas.openxmlformats.org/presentationml/2006/main">
+  <p:cSld>
+    <p:spTree>
+      <p:nvGrpSpPr>
+        <p:cNvPr id="1" name=""/>
+        <p:cNvGrpSpPr/>
+        <p:nvPr/>
+      </p:nvGrpSpPr>
+      <p:grpSpPr>
+        <a:xfrm>
+          <a:off x="0" y="0"/>
+          <a:ext cx="0" cy="0"/>
+          <a:chOff x="0" y="0"/>
+          <a:chExt cx="0" cy="0"/>
+        </a:xfrm>
+      </p:grpSpPr>
+      <p:sp>
+        <p:nvSpPr>
+          <p:cNvPr id="2" name="Slide Image Placeholder 1"/>
+          <p:cNvSpPr>
+            <a:spLocks noGrp="1" noRot="1" noChangeAspect="1"/>
+          </p:cNvSpPr>
+          <p:nvPr>
+            <p:ph type="sldImg"/>
+          </p:nvPr>
+        </p:nvSpPr>
+        <p:spPr/>
+      </p:sp>
+      <p:sp>
+        <p:nvSpPr>
+          <p:cNvPr id="3" name="Notes Placeholder 2"/>
+          <p:cNvSpPr>
+            <a:spLocks noGrp="1"/>
+          </p:cNvSpPr>
+          <p:nvPr>
+            <p:ph type="body" idx="1"/>
+          </p:nvPr>
+        </p:nvSpPr>
+        <p:spPr/>
+        <p:txBody>
+          <a:bodyPr/>
+          <a:lstStyle/>
+          <a:p>
+            <a:endParaRPr lang="en-US" dirty="0"/>
+          </a:p>
+        </p:txBody>
+      </p:sp>
+      <p:sp>
+        <p:nvSpPr>
+          <p:cNvPr id="4" name="Slide Number Placeholder 3"/>
+          <p:cNvSpPr>
+            <a:spLocks noGrp="1"/>
+          </p:cNvSpPr>
+          <p:nvPr>
+            <p:ph type="sldNum" sz="quarter" idx="10"/>
+          </p:nvPr>
+        </p:nvSpPr>
+        <p:spPr/>
+        <p:txBody>
+          <a:bodyPr/>
+          <a:lstStyle/>
+          <a:p>
+            <a:fld id="{F7021451-1387-4CA6-816F-3879F97B5CBC}" type="slidenum">
+              <a:rPr lang="en-US"/>
+              <a:t>12</a:t>
+            </a:fld>
+            <a:endParaRPr lang="en-US"/>
+          </a:p>
+        </p:txBody>
+      </p:sp>
+    </p:spTree>
+    <p:extLst>
+      <p:ext uri="{BB962C8B-B14F-4D97-AF65-F5344CB8AC3E}">
+        <p14:creationId xmlns:p14="http://schemas.microsoft.com/office/powerpoint/2010/main" val="1024086991"/>
+      </p:ext>
+    </p:extLst>
+  </p:cSld>
+  <p:clrMapOvr>
+    <a:masterClrMapping/>
+  </p:clrMapOvr>
+</p:notes>
+</file>
+
 <file path=ppt/notesSlides/notesSlide2.xml><?xml version="1.0" encoding="utf-8"?>
 <p:notes xmlns:a="http://schemas.openxmlformats.org/drawingml/2006/main" xmlns:r="http://schemas.openxmlformats.org/officeDocument/2006/relationships" xmlns:p="http://schemas.openxmlformats.org/presentationml/2006/main">
   <p:cSld>
@@ -755,7 +925,13 @@
   <p:cSld>
     <p:spTree>
       <p:nvGrpSpPr>
-        <p:cNvPr id="1" name=""/>
+        <p:cNvPr id="1" name="">
+          <a:extLst>
+            <a:ext uri="{FF2B5EF4-FFF2-40B4-BE49-F238E27FC236}">
+              <a16:creationId xmlns:a16="http://schemas.microsoft.com/office/drawing/2014/main" id="{7E2A3A17-9A48-114F-D4C2-29C76636C165}"/>
+            </a:ext>
+          </a:extLst>
+        </p:cNvPr>
         <p:cNvGrpSpPr/>
         <p:nvPr/>
       </p:nvGrpSpPr>
@@ -769,7 +945,13 @@
       </p:grpSpPr>
       <p:sp>
         <p:nvSpPr>
-          <p:cNvPr id="2" name="Slide Image Placeholder 1"/>
+          <p:cNvPr id="2" name="Slide Image Placeholder 1">
+            <a:extLst>
+              <a:ext uri="{FF2B5EF4-FFF2-40B4-BE49-F238E27FC236}">
+                <a16:creationId xmlns:a16="http://schemas.microsoft.com/office/drawing/2014/main" id="{18350ABB-5DBB-E75A-1A50-30460583E522}"/>
+              </a:ext>
+            </a:extLst>
+          </p:cNvPr>
           <p:cNvSpPr>
             <a:spLocks noGrp="1" noRot="1" noChangeAspect="1"/>
           </p:cNvSpPr>
@@ -781,7 +963,13 @@
       </p:sp>
       <p:sp>
         <p:nvSpPr>
-          <p:cNvPr id="3" name="Notes Placeholder 2"/>
+          <p:cNvPr id="3" name="Notes Placeholder 2">
+            <a:extLst>
+              <a:ext uri="{FF2B5EF4-FFF2-40B4-BE49-F238E27FC236}">
+                <a16:creationId xmlns:a16="http://schemas.microsoft.com/office/drawing/2014/main" id="{4682C245-90B6-7E61-1D95-6D61E7B918ED}"/>
+              </a:ext>
+            </a:extLst>
+          </p:cNvPr>
           <p:cNvSpPr>
             <a:spLocks noGrp="1"/>
           </p:cNvSpPr>
@@ -800,7 +988,13 @@
       </p:sp>
       <p:sp>
         <p:nvSpPr>
-          <p:cNvPr id="4" name="Slide Number Placeholder 3"/>
+          <p:cNvPr id="4" name="Slide Number Placeholder 3">
+            <a:extLst>
+              <a:ext uri="{FF2B5EF4-FFF2-40B4-BE49-F238E27FC236}">
+                <a16:creationId xmlns:a16="http://schemas.microsoft.com/office/drawing/2014/main" id="{C09C2521-3E85-ED27-D4A5-7A2873F1545F}"/>
+              </a:ext>
+            </a:extLst>
+          </p:cNvPr>
           <p:cNvSpPr>
             <a:spLocks noGrp="1"/>
           </p:cNvSpPr>
@@ -824,7 +1018,7 @@
     </p:spTree>
     <p:extLst>
       <p:ext uri="{BB962C8B-B14F-4D97-AF65-F5344CB8AC3E}">
-        <p14:creationId xmlns:p14="http://schemas.microsoft.com/office/powerpoint/2010/main" val="1024086991"/>
+        <p14:creationId xmlns:p14="http://schemas.microsoft.com/office/powerpoint/2010/main" val="631980268"/>
       </p:ext>
     </p:extLst>
   </p:cSld>
@@ -839,7 +1033,13 @@
   <p:cSld>
     <p:spTree>
       <p:nvGrpSpPr>
-        <p:cNvPr id="1" name=""/>
+        <p:cNvPr id="1" name="">
+          <a:extLst>
+            <a:ext uri="{FF2B5EF4-FFF2-40B4-BE49-F238E27FC236}">
+              <a16:creationId xmlns:a16="http://schemas.microsoft.com/office/drawing/2014/main" id="{0BC1C3FA-6889-4D07-829F-BD8098D6920E}"/>
+            </a:ext>
+          </a:extLst>
+        </p:cNvPr>
         <p:cNvGrpSpPr/>
         <p:nvPr/>
       </p:nvGrpSpPr>
@@ -853,7 +1053,13 @@
       </p:grpSpPr>
       <p:sp>
         <p:nvSpPr>
-          <p:cNvPr id="2" name="Slide Image Placeholder 1"/>
+          <p:cNvPr id="2" name="Slide Image Placeholder 1">
+            <a:extLst>
+              <a:ext uri="{FF2B5EF4-FFF2-40B4-BE49-F238E27FC236}">
+                <a16:creationId xmlns:a16="http://schemas.microsoft.com/office/drawing/2014/main" id="{44B5F276-8CBD-A03A-2ED1-70A11A194688}"/>
+              </a:ext>
+            </a:extLst>
+          </p:cNvPr>
           <p:cNvSpPr>
             <a:spLocks noGrp="1" noRot="1" noChangeAspect="1"/>
           </p:cNvSpPr>
@@ -865,7 +1071,13 @@
       </p:sp>
       <p:sp>
         <p:nvSpPr>
-          <p:cNvPr id="3" name="Notes Placeholder 2"/>
+          <p:cNvPr id="3" name="Notes Placeholder 2">
+            <a:extLst>
+              <a:ext uri="{FF2B5EF4-FFF2-40B4-BE49-F238E27FC236}">
+                <a16:creationId xmlns:a16="http://schemas.microsoft.com/office/drawing/2014/main" id="{06F8B2ED-3FD8-650E-4E77-3417CA867499}"/>
+              </a:ext>
+            </a:extLst>
+          </p:cNvPr>
           <p:cNvSpPr>
             <a:spLocks noGrp="1"/>
           </p:cNvSpPr>
@@ -884,7 +1096,13 @@
       </p:sp>
       <p:sp>
         <p:nvSpPr>
-          <p:cNvPr id="4" name="Slide Number Placeholder 3"/>
+          <p:cNvPr id="4" name="Slide Number Placeholder 3">
+            <a:extLst>
+              <a:ext uri="{FF2B5EF4-FFF2-40B4-BE49-F238E27FC236}">
+                <a16:creationId xmlns:a16="http://schemas.microsoft.com/office/drawing/2014/main" id="{3F289C3D-5DB6-7FBA-91E1-542AA9DDF8F0}"/>
+              </a:ext>
+            </a:extLst>
+          </p:cNvPr>
           <p:cNvSpPr>
             <a:spLocks noGrp="1"/>
           </p:cNvSpPr>
@@ -908,7 +1126,7 @@
     </p:spTree>
     <p:extLst>
       <p:ext uri="{BB962C8B-B14F-4D97-AF65-F5344CB8AC3E}">
-        <p14:creationId xmlns:p14="http://schemas.microsoft.com/office/powerpoint/2010/main" val="1024086991"/>
+        <p14:creationId xmlns:p14="http://schemas.microsoft.com/office/powerpoint/2010/main" val="3557975148"/>
       </p:ext>
     </p:extLst>
   </p:cSld>
@@ -1605,6 +1823,17 @@
               <a:buNone/>
             </a:pPr>
             <a:r>
+              <a:rPr lang="en-US" sz="1300" b="1" dirty="0" err="1">
+                <a:solidFill>
+                  <a:srgbClr val="FFFFFF"/>
+                </a:solidFill>
+                <a:latin typeface="Calibri" pitchFamily="34" charset="0"/>
+                <a:ea typeface="Calibri" pitchFamily="34" charset="-122"/>
+                <a:cs typeface="Calibri" pitchFamily="34" charset="-120"/>
+              </a:rPr>
+              <a:t>Mccain</a:t>
+            </a:r>
+            <a:r>
               <a:rPr lang="en-US" sz="1300" b="1" dirty="0">
                 <a:solidFill>
                   <a:srgbClr val="FFFFFF"/>
@@ -1613,7 +1842,7 @@
                 <a:ea typeface="Calibri" pitchFamily="34" charset="-122"/>
                 <a:cs typeface="Calibri" pitchFamily="34" charset="-120"/>
               </a:rPr>
-              <a:t>StatusNeo — Forward Deployed Engineering</a:t>
+              <a:t> Meridian Dev Team</a:t>
             </a:r>
             <a:r>
               <a:rPr lang="en-US" sz="1300" dirty="0">
@@ -1639,6 +1868,1604 @@
 </file>
 
 <file path=ppt/slides/slide10.xml><?xml version="1.0" encoding="utf-8"?>
+<p:sld xmlns:a="http://schemas.openxmlformats.org/drawingml/2006/main" xmlns:r="http://schemas.openxmlformats.org/officeDocument/2006/relationships" xmlns:p="http://schemas.openxmlformats.org/presentationml/2006/main">
+  <p:cSld name="Slide 8">
+    <p:bg>
+      <p:bgPr>
+        <a:solidFill>
+          <a:srgbClr val="FFFFFF"/>
+        </a:solidFill>
+        <a:effectLst/>
+      </p:bgPr>
+    </p:bg>
+    <p:spTree>
+      <p:nvGrpSpPr>
+        <p:cNvPr id="1" name=""/>
+        <p:cNvGrpSpPr/>
+        <p:nvPr/>
+      </p:nvGrpSpPr>
+      <p:grpSpPr>
+        <a:xfrm>
+          <a:off x="0" y="0"/>
+          <a:ext cx="0" cy="0"/>
+          <a:chOff x="0" y="0"/>
+          <a:chExt cx="0" cy="0"/>
+        </a:xfrm>
+      </p:grpSpPr>
+      <p:sp>
+        <p:nvSpPr>
+          <p:cNvPr id="2" name="Text 0"/>
+          <p:cNvSpPr/>
+          <p:nvPr/>
+        </p:nvSpPr>
+        <p:spPr>
+          <a:xfrm>
+            <a:off x="548640" y="384048"/>
+            <a:ext cx="7315200" cy="274320"/>
+          </a:xfrm>
+          <a:prstGeom prst="rect">
+            <a:avLst/>
+          </a:prstGeom>
+          <a:noFill/>
+          <a:ln/>
+        </p:spPr>
+        <p:txBody>
+          <a:bodyPr wrap="square" lIns="0" tIns="0" rIns="0" bIns="0" rtlCol="0" anchor="ctr"/>
+          <a:lstStyle/>
+          <a:p>
+            <a:pPr marL="0" indent="0">
+              <a:buNone/>
+            </a:pPr>
+            <a:r>
+              <a:rPr lang="en-US" sz="1200" b="1" kern="0" spc="200" dirty="0">
+                <a:solidFill>
+                  <a:srgbClr val="FF3621"/>
+                </a:solidFill>
+                <a:latin typeface="Calibri" pitchFamily="34" charset="0"/>
+                <a:ea typeface="Calibri" pitchFamily="34" charset="-122"/>
+                <a:cs typeface="Calibri" pitchFamily="34" charset="-120"/>
+              </a:rPr>
+              <a:t>CURRENT STATUS</a:t>
+            </a:r>
+            <a:endParaRPr lang="en-US" sz="1200" dirty="0"/>
+          </a:p>
+        </p:txBody>
+      </p:sp>
+      <p:sp>
+        <p:nvSpPr>
+          <p:cNvPr id="3" name="Text 1"/>
+          <p:cNvSpPr/>
+          <p:nvPr/>
+        </p:nvSpPr>
+        <p:spPr>
+          <a:xfrm>
+            <a:off x="548640" y="658368"/>
+            <a:ext cx="10515600" cy="822960"/>
+          </a:xfrm>
+          <a:prstGeom prst="rect">
+            <a:avLst/>
+          </a:prstGeom>
+          <a:noFill/>
+          <a:ln/>
+        </p:spPr>
+        <p:txBody>
+          <a:bodyPr wrap="square" lIns="0" tIns="0" rIns="0" bIns="0" rtlCol="0" anchor="ctr"/>
+          <a:lstStyle/>
+          <a:p>
+            <a:pPr marL="0" indent="0">
+              <a:buNone/>
+            </a:pPr>
+            <a:r>
+              <a:rPr lang="en-US" sz="3000" b="1" dirty="0">
+                <a:solidFill>
+                  <a:srgbClr val="12203A"/>
+                </a:solidFill>
+                <a:latin typeface="Cambria" pitchFamily="34" charset="0"/>
+                <a:ea typeface="Cambria" pitchFamily="34" charset="-122"/>
+                <a:cs typeface="Cambria" pitchFamily="34" charset="-120"/>
+              </a:rPr>
+              <a:t>Where we are today — Day 1 of Sprint 1</a:t>
+            </a:r>
+            <a:endParaRPr lang="en-US" sz="3000" dirty="0"/>
+          </a:p>
+        </p:txBody>
+      </p:sp>
+      <p:sp>
+        <p:nvSpPr>
+          <p:cNvPr id="4" name="Shape 2"/>
+          <p:cNvSpPr/>
+          <p:nvPr/>
+        </p:nvSpPr>
+        <p:spPr>
+          <a:xfrm>
+            <a:off x="548640" y="1828800"/>
+            <a:ext cx="5212080" cy="4160520"/>
+          </a:xfrm>
+          <a:prstGeom prst="roundRect">
+            <a:avLst>
+              <a:gd name="adj" fmla="val 1758"/>
+            </a:avLst>
+          </a:prstGeom>
+          <a:solidFill>
+            <a:srgbClr val="EAF6EE"/>
+          </a:solidFill>
+          <a:ln w="12700">
+            <a:solidFill>
+              <a:srgbClr val="1F7A43"/>
+            </a:solidFill>
+            <a:prstDash val="solid"/>
+          </a:ln>
+        </p:spPr>
+      </p:sp>
+      <p:sp>
+        <p:nvSpPr>
+          <p:cNvPr id="5" name="Text 3"/>
+          <p:cNvSpPr/>
+          <p:nvPr/>
+        </p:nvSpPr>
+        <p:spPr>
+          <a:xfrm>
+            <a:off x="777240" y="1993392"/>
+            <a:ext cx="4754880" cy="320040"/>
+          </a:xfrm>
+          <a:prstGeom prst="rect">
+            <a:avLst/>
+          </a:prstGeom>
+          <a:noFill/>
+          <a:ln/>
+        </p:spPr>
+        <p:txBody>
+          <a:bodyPr wrap="square" lIns="0" tIns="0" rIns="0" bIns="0" rtlCol="0" anchor="ctr"/>
+          <a:lstStyle/>
+          <a:p>
+            <a:pPr marL="0" indent="0">
+              <a:buNone/>
+            </a:pPr>
+            <a:r>
+              <a:rPr lang="en-US" sz="1300" b="1" dirty="0">
+                <a:solidFill>
+                  <a:srgbClr val="1F7A43"/>
+                </a:solidFill>
+                <a:latin typeface="Calibri" pitchFamily="34" charset="0"/>
+                <a:ea typeface="Calibri" pitchFamily="34" charset="-122"/>
+                <a:cs typeface="Calibri" pitchFamily="34" charset="-120"/>
+              </a:rPr>
+              <a:t>DONE</a:t>
+            </a:r>
+            <a:endParaRPr lang="en-US" sz="1300" dirty="0"/>
+          </a:p>
+        </p:txBody>
+      </p:sp>
+      <p:sp>
+        <p:nvSpPr>
+          <p:cNvPr id="6" name="Shape 4"/>
+          <p:cNvSpPr/>
+          <p:nvPr/>
+        </p:nvSpPr>
+        <p:spPr>
+          <a:xfrm>
+            <a:off x="804672" y="2450592"/>
+            <a:ext cx="146304" cy="146304"/>
+          </a:xfrm>
+          <a:prstGeom prst="ellipse">
+            <a:avLst/>
+          </a:prstGeom>
+          <a:solidFill>
+            <a:srgbClr val="1F7A43"/>
+          </a:solidFill>
+          <a:ln w="19050">
+            <a:solidFill>
+              <a:srgbClr val="1F7A43"/>
+            </a:solidFill>
+            <a:prstDash val="solid"/>
+          </a:ln>
+        </p:spPr>
+      </p:sp>
+      <p:sp>
+        <p:nvSpPr>
+          <p:cNvPr id="7" name="Text 5"/>
+          <p:cNvSpPr/>
+          <p:nvPr/>
+        </p:nvSpPr>
+        <p:spPr>
+          <a:xfrm>
+            <a:off x="1078992" y="2350008"/>
+            <a:ext cx="4389120" cy="502920"/>
+          </a:xfrm>
+          <a:prstGeom prst="rect">
+            <a:avLst/>
+          </a:prstGeom>
+          <a:noFill/>
+          <a:ln/>
+        </p:spPr>
+        <p:txBody>
+          <a:bodyPr wrap="square" lIns="0" tIns="0" rIns="0" bIns="0" rtlCol="0" anchor="ctr"/>
+          <a:lstStyle/>
+          <a:p>
+            <a:pPr marL="0" indent="0">
+              <a:buNone/>
+            </a:pPr>
+            <a:r>
+              <a:rPr lang="en-US" sz="1200" dirty="0">
+                <a:solidFill>
+                  <a:srgbClr val="12203A"/>
+                </a:solidFill>
+                <a:latin typeface="Calibri" pitchFamily="34" charset="0"/>
+                <a:ea typeface="Calibri" pitchFamily="34" charset="-122"/>
+                <a:cs typeface="Calibri" pitchFamily="34" charset="-120"/>
+              </a:rPr>
+              <a:t>Requirements &amp; environment (Dev/QA/Prod) plan finalized</a:t>
+            </a:r>
+            <a:endParaRPr lang="en-US" sz="1200" dirty="0"/>
+          </a:p>
+        </p:txBody>
+      </p:sp>
+      <p:sp>
+        <p:nvSpPr>
+          <p:cNvPr id="8" name="Shape 6"/>
+          <p:cNvSpPr/>
+          <p:nvPr/>
+        </p:nvSpPr>
+        <p:spPr>
+          <a:xfrm>
+            <a:off x="804672" y="3108960"/>
+            <a:ext cx="146304" cy="146304"/>
+          </a:xfrm>
+          <a:prstGeom prst="ellipse">
+            <a:avLst/>
+          </a:prstGeom>
+          <a:solidFill>
+            <a:srgbClr val="1F7A43"/>
+          </a:solidFill>
+          <a:ln w="19050">
+            <a:solidFill>
+              <a:srgbClr val="1F7A43"/>
+            </a:solidFill>
+            <a:prstDash val="solid"/>
+          </a:ln>
+        </p:spPr>
+      </p:sp>
+      <p:sp>
+        <p:nvSpPr>
+          <p:cNvPr id="9" name="Text 7"/>
+          <p:cNvSpPr/>
+          <p:nvPr/>
+        </p:nvSpPr>
+        <p:spPr>
+          <a:xfrm>
+            <a:off x="1078992" y="3008376"/>
+            <a:ext cx="4389120" cy="502920"/>
+          </a:xfrm>
+          <a:prstGeom prst="rect">
+            <a:avLst/>
+          </a:prstGeom>
+          <a:noFill/>
+          <a:ln/>
+        </p:spPr>
+        <p:txBody>
+          <a:bodyPr wrap="square" lIns="0" tIns="0" rIns="0" bIns="0" rtlCol="0" anchor="ctr"/>
+          <a:lstStyle/>
+          <a:p>
+            <a:pPr marL="0" indent="0">
+              <a:buNone/>
+            </a:pPr>
+            <a:r>
+              <a:rPr lang="en-US" sz="1200" dirty="0">
+                <a:solidFill>
+                  <a:srgbClr val="12203A"/>
+                </a:solidFill>
+                <a:latin typeface="Calibri" pitchFamily="34" charset="0"/>
+                <a:ea typeface="Calibri" pitchFamily="34" charset="-122"/>
+                <a:cs typeface="Calibri" pitchFamily="34" charset="-120"/>
+              </a:rPr>
+              <a:t>Reference architecture defined — defense-in-depth, Databricks-native</a:t>
+            </a:r>
+            <a:endParaRPr lang="en-US" sz="1200" dirty="0"/>
+          </a:p>
+        </p:txBody>
+      </p:sp>
+      <p:sp>
+        <p:nvSpPr>
+          <p:cNvPr id="10" name="Shape 8"/>
+          <p:cNvSpPr/>
+          <p:nvPr/>
+        </p:nvSpPr>
+        <p:spPr>
+          <a:xfrm>
+            <a:off x="804672" y="3767328"/>
+            <a:ext cx="146304" cy="146304"/>
+          </a:xfrm>
+          <a:prstGeom prst="ellipse">
+            <a:avLst/>
+          </a:prstGeom>
+          <a:solidFill>
+            <a:srgbClr val="1F7A43"/>
+          </a:solidFill>
+          <a:ln w="19050">
+            <a:solidFill>
+              <a:srgbClr val="1F7A43"/>
+            </a:solidFill>
+            <a:prstDash val="solid"/>
+          </a:ln>
+        </p:spPr>
+      </p:sp>
+      <p:sp>
+        <p:nvSpPr>
+          <p:cNvPr id="11" name="Text 9"/>
+          <p:cNvSpPr/>
+          <p:nvPr/>
+        </p:nvSpPr>
+        <p:spPr>
+          <a:xfrm>
+            <a:off x="1078992" y="3666744"/>
+            <a:ext cx="4389120" cy="502920"/>
+          </a:xfrm>
+          <a:prstGeom prst="rect">
+            <a:avLst/>
+          </a:prstGeom>
+          <a:noFill/>
+          <a:ln/>
+        </p:spPr>
+        <p:txBody>
+          <a:bodyPr wrap="square" lIns="0" tIns="0" rIns="0" bIns="0" rtlCol="0" anchor="ctr"/>
+          <a:lstStyle/>
+          <a:p>
+            <a:pPr marL="0" indent="0">
+              <a:buNone/>
+            </a:pPr>
+            <a:r>
+              <a:rPr lang="en-US" sz="1200" dirty="0">
+                <a:solidFill>
+                  <a:srgbClr val="12203A"/>
+                </a:solidFill>
+                <a:latin typeface="Calibri" pitchFamily="34" charset="0"/>
+                <a:ea typeface="Calibri" pitchFamily="34" charset="-122"/>
+                <a:cs typeface="Calibri" pitchFamily="34" charset="-120"/>
+              </a:rPr>
+              <a:t>3-month, 6-sprint delivery plan finalized</a:t>
+            </a:r>
+            <a:endParaRPr lang="en-US" sz="1200" dirty="0"/>
+          </a:p>
+        </p:txBody>
+      </p:sp>
+      <p:sp>
+        <p:nvSpPr>
+          <p:cNvPr id="12" name="Shape 10"/>
+          <p:cNvSpPr/>
+          <p:nvPr/>
+        </p:nvSpPr>
+        <p:spPr>
+          <a:xfrm>
+            <a:off x="804672" y="4425696"/>
+            <a:ext cx="146304" cy="146304"/>
+          </a:xfrm>
+          <a:prstGeom prst="ellipse">
+            <a:avLst/>
+          </a:prstGeom>
+          <a:solidFill>
+            <a:srgbClr val="1F7A43"/>
+          </a:solidFill>
+          <a:ln w="19050">
+            <a:solidFill>
+              <a:srgbClr val="1F7A43"/>
+            </a:solidFill>
+            <a:prstDash val="solid"/>
+          </a:ln>
+        </p:spPr>
+      </p:sp>
+      <p:sp>
+        <p:nvSpPr>
+          <p:cNvPr id="13" name="Text 11"/>
+          <p:cNvSpPr/>
+          <p:nvPr/>
+        </p:nvSpPr>
+        <p:spPr>
+          <a:xfrm>
+            <a:off x="1078992" y="4325112"/>
+            <a:ext cx="4389120" cy="502920"/>
+          </a:xfrm>
+          <a:prstGeom prst="rect">
+            <a:avLst/>
+          </a:prstGeom>
+          <a:noFill/>
+          <a:ln/>
+        </p:spPr>
+        <p:txBody>
+          <a:bodyPr wrap="square" lIns="0" tIns="0" rIns="0" bIns="0" rtlCol="0" anchor="ctr"/>
+          <a:lstStyle/>
+          <a:p>
+            <a:pPr marL="0" indent="0">
+              <a:buNone/>
+            </a:pPr>
+            <a:r>
+              <a:rPr lang="en-US" sz="1200" dirty="0">
+                <a:solidFill>
+                  <a:srgbClr val="12203A"/>
+                </a:solidFill>
+                <a:latin typeface="Calibri" pitchFamily="34" charset="0"/>
+                <a:ea typeface="Calibri" pitchFamily="34" charset="-122"/>
+                <a:cs typeface="Calibri" pitchFamily="34" charset="-120"/>
+              </a:rPr>
+              <a:t>Sprint 1 backlog scoped in detail — 11 tasks, owners assigned</a:t>
+            </a:r>
+            <a:endParaRPr lang="en-US" sz="1200" dirty="0"/>
+          </a:p>
+        </p:txBody>
+      </p:sp>
+      <p:sp>
+        <p:nvSpPr>
+          <p:cNvPr id="14" name="Shape 12"/>
+          <p:cNvSpPr/>
+          <p:nvPr/>
+        </p:nvSpPr>
+        <p:spPr>
+          <a:xfrm>
+            <a:off x="804672" y="5084064"/>
+            <a:ext cx="146304" cy="146304"/>
+          </a:xfrm>
+          <a:prstGeom prst="ellipse">
+            <a:avLst/>
+          </a:prstGeom>
+          <a:solidFill>
+            <a:srgbClr val="1F7A43"/>
+          </a:solidFill>
+          <a:ln w="19050">
+            <a:solidFill>
+              <a:srgbClr val="1F7A43"/>
+            </a:solidFill>
+            <a:prstDash val="solid"/>
+          </a:ln>
+        </p:spPr>
+      </p:sp>
+      <p:sp>
+        <p:nvSpPr>
+          <p:cNvPr id="15" name="Text 13"/>
+          <p:cNvSpPr/>
+          <p:nvPr/>
+        </p:nvSpPr>
+        <p:spPr>
+          <a:xfrm>
+            <a:off x="1078992" y="4983480"/>
+            <a:ext cx="4389120" cy="502920"/>
+          </a:xfrm>
+          <a:prstGeom prst="rect">
+            <a:avLst/>
+          </a:prstGeom>
+          <a:noFill/>
+          <a:ln/>
+        </p:spPr>
+        <p:txBody>
+          <a:bodyPr wrap="square" lIns="0" tIns="0" rIns="0" bIns="0" rtlCol="0" anchor="ctr"/>
+          <a:lstStyle/>
+          <a:p>
+            <a:pPr marL="0" indent="0">
+              <a:buNone/>
+            </a:pPr>
+            <a:r>
+              <a:rPr lang="en-US" sz="1200" dirty="0">
+                <a:solidFill>
+                  <a:srgbClr val="12203A"/>
+                </a:solidFill>
+                <a:latin typeface="Calibri" pitchFamily="34" charset="0"/>
+                <a:ea typeface="Calibri" pitchFamily="34" charset="-122"/>
+                <a:cs typeface="Calibri" pitchFamily="34" charset="-120"/>
+              </a:rPr>
+              <a:t>22 open questions identified for McCain &amp; internal product team</a:t>
+            </a:r>
+            <a:endParaRPr lang="en-US" sz="1200" dirty="0"/>
+          </a:p>
+        </p:txBody>
+      </p:sp>
+      <p:sp>
+        <p:nvSpPr>
+          <p:cNvPr id="16" name="Shape 14"/>
+          <p:cNvSpPr/>
+          <p:nvPr/>
+        </p:nvSpPr>
+        <p:spPr>
+          <a:xfrm>
+            <a:off x="6080760" y="1828800"/>
+            <a:ext cx="5212080" cy="1965960"/>
+          </a:xfrm>
+          <a:prstGeom prst="roundRect">
+            <a:avLst>
+              <a:gd name="adj" fmla="val 3721"/>
+            </a:avLst>
+          </a:prstGeom>
+          <a:solidFill>
+            <a:srgbClr val="FDF4E3"/>
+          </a:solidFill>
+          <a:ln w="12700">
+            <a:solidFill>
+              <a:srgbClr val="C9821A"/>
+            </a:solidFill>
+            <a:prstDash val="solid"/>
+          </a:ln>
+        </p:spPr>
+      </p:sp>
+      <p:sp>
+        <p:nvSpPr>
+          <p:cNvPr id="17" name="Text 15"/>
+          <p:cNvSpPr/>
+          <p:nvPr/>
+        </p:nvSpPr>
+        <p:spPr>
+          <a:xfrm>
+            <a:off x="6309360" y="1993392"/>
+            <a:ext cx="4754880" cy="320040"/>
+          </a:xfrm>
+          <a:prstGeom prst="rect">
+            <a:avLst/>
+          </a:prstGeom>
+          <a:noFill/>
+          <a:ln/>
+        </p:spPr>
+        <p:txBody>
+          <a:bodyPr wrap="square" lIns="0" tIns="0" rIns="0" bIns="0" rtlCol="0" anchor="ctr"/>
+          <a:lstStyle/>
+          <a:p>
+            <a:pPr marL="0" indent="0">
+              <a:buNone/>
+            </a:pPr>
+            <a:r>
+              <a:rPr lang="en-US" sz="1300" b="1" dirty="0">
+                <a:solidFill>
+                  <a:srgbClr val="C9821A"/>
+                </a:solidFill>
+                <a:latin typeface="Calibri" pitchFamily="34" charset="0"/>
+                <a:ea typeface="Calibri" pitchFamily="34" charset="-122"/>
+                <a:cs typeface="Calibri" pitchFamily="34" charset="-120"/>
+              </a:rPr>
+              <a:t>IN PROGRESS — SPRINT 1</a:t>
+            </a:r>
+            <a:endParaRPr lang="en-US" sz="1300" dirty="0"/>
+          </a:p>
+        </p:txBody>
+      </p:sp>
+      <p:sp>
+        <p:nvSpPr>
+          <p:cNvPr id="18" name="Text 16"/>
+          <p:cNvSpPr/>
+          <p:nvPr/>
+        </p:nvSpPr>
+        <p:spPr>
+          <a:xfrm>
+            <a:off x="6309360" y="2331720"/>
+            <a:ext cx="4754880" cy="320040"/>
+          </a:xfrm>
+          <a:prstGeom prst="rect">
+            <a:avLst/>
+          </a:prstGeom>
+          <a:noFill/>
+          <a:ln/>
+        </p:spPr>
+        <p:txBody>
+          <a:bodyPr wrap="square" lIns="0" tIns="0" rIns="0" bIns="0" rtlCol="0" anchor="ctr"/>
+          <a:lstStyle/>
+          <a:p>
+            <a:pPr marL="0" indent="0">
+              <a:buNone/>
+            </a:pPr>
+            <a:r>
+              <a:rPr lang="en-US" sz="1500" b="1" dirty="0">
+                <a:solidFill>
+                  <a:srgbClr val="12203A"/>
+                </a:solidFill>
+                <a:latin typeface="Cambria" pitchFamily="34" charset="0"/>
+                <a:ea typeface="Cambria" pitchFamily="34" charset="-122"/>
+                <a:cs typeface="Cambria" pitchFamily="34" charset="-120"/>
+              </a:rPr>
+              <a:t>Order Status flagship build</a:t>
+            </a:r>
+            <a:endParaRPr lang="en-US" sz="1500" dirty="0"/>
+          </a:p>
+        </p:txBody>
+      </p:sp>
+      <p:sp>
+        <p:nvSpPr>
+          <p:cNvPr id="19" name="Text 17"/>
+          <p:cNvSpPr/>
+          <p:nvPr/>
+        </p:nvSpPr>
+        <p:spPr>
+          <a:xfrm>
+            <a:off x="6309360" y="2697480"/>
+            <a:ext cx="4754880" cy="640080"/>
+          </a:xfrm>
+          <a:prstGeom prst="rect">
+            <a:avLst/>
+          </a:prstGeom>
+          <a:noFill/>
+          <a:ln/>
+        </p:spPr>
+        <p:txBody>
+          <a:bodyPr wrap="square" lIns="0" tIns="0" rIns="0" bIns="0" rtlCol="0" anchor="ctr"/>
+          <a:lstStyle/>
+          <a:p>
+            <a:pPr marL="0" indent="0">
+              <a:buNone/>
+            </a:pPr>
+            <a:r>
+              <a:rPr lang="en-US" sz="1100" dirty="0">
+                <a:solidFill>
+                  <a:srgbClr val="12203A"/>
+                </a:solidFill>
+                <a:latin typeface="Calibri" pitchFamily="34" charset="0"/>
+                <a:ea typeface="Calibri" pitchFamily="34" charset="-122"/>
+                <a:cs typeface="Calibri" pitchFamily="34" charset="-120"/>
+              </a:rPr>
+              <a:t>RBAC &amp; Unity Catalog scope · DB Shield · all 8 order states · disambiguation &amp; follow-ups · guardrails · tracing &amp; evaluation gate · UI prototype</a:t>
+            </a:r>
+            <a:endParaRPr lang="en-US" sz="1100" dirty="0"/>
+          </a:p>
+        </p:txBody>
+      </p:sp>
+      <p:sp>
+        <p:nvSpPr>
+          <p:cNvPr id="20" name="Text 18"/>
+          <p:cNvSpPr/>
+          <p:nvPr/>
+        </p:nvSpPr>
+        <p:spPr>
+          <a:xfrm>
+            <a:off x="6309360" y="3337560"/>
+            <a:ext cx="4754880" cy="365760"/>
+          </a:xfrm>
+          <a:prstGeom prst="rect">
+            <a:avLst/>
+          </a:prstGeom>
+          <a:noFill/>
+          <a:ln/>
+        </p:spPr>
+        <p:txBody>
+          <a:bodyPr wrap="square" lIns="0" tIns="0" rIns="0" bIns="0" rtlCol="0" anchor="ctr"/>
+          <a:lstStyle/>
+          <a:p>
+            <a:pPr marL="0" indent="0">
+              <a:buNone/>
+            </a:pPr>
+            <a:r>
+              <a:rPr lang="en-US" sz="1050" i="1" dirty="0">
+                <a:solidFill>
+                  <a:srgbClr val="5B6472"/>
+                </a:solidFill>
+                <a:latin typeface="Calibri" pitchFamily="34" charset="0"/>
+                <a:ea typeface="Calibri" pitchFamily="34" charset="-122"/>
+                <a:cs typeface="Calibri" pitchFamily="34" charset="-120"/>
+              </a:rPr>
+              <a:t>Target: working demo + evaluation gate passed by 11 Aug</a:t>
+            </a:r>
+            <a:endParaRPr lang="en-US" sz="1050" dirty="0"/>
+          </a:p>
+        </p:txBody>
+      </p:sp>
+      <p:sp>
+        <p:nvSpPr>
+          <p:cNvPr id="21" name="Shape 19"/>
+          <p:cNvSpPr/>
+          <p:nvPr/>
+        </p:nvSpPr>
+        <p:spPr>
+          <a:xfrm>
+            <a:off x="6080760" y="3977640"/>
+            <a:ext cx="5212080" cy="2011680"/>
+          </a:xfrm>
+          <a:prstGeom prst="roundRect">
+            <a:avLst>
+              <a:gd name="adj" fmla="val 3636"/>
+            </a:avLst>
+          </a:prstGeom>
+          <a:solidFill>
+            <a:srgbClr val="F4F6FA"/>
+          </a:solidFill>
+          <a:ln w="12700">
+            <a:solidFill>
+              <a:srgbClr val="E1E5EE"/>
+            </a:solidFill>
+            <a:prstDash val="solid"/>
+          </a:ln>
+        </p:spPr>
+      </p:sp>
+      <p:sp>
+        <p:nvSpPr>
+          <p:cNvPr id="22" name="Text 20"/>
+          <p:cNvSpPr/>
+          <p:nvPr/>
+        </p:nvSpPr>
+        <p:spPr>
+          <a:xfrm>
+            <a:off x="6309360" y="4142232"/>
+            <a:ext cx="4754880" cy="320040"/>
+          </a:xfrm>
+          <a:prstGeom prst="rect">
+            <a:avLst/>
+          </a:prstGeom>
+          <a:noFill/>
+          <a:ln/>
+        </p:spPr>
+        <p:txBody>
+          <a:bodyPr wrap="square" lIns="0" tIns="0" rIns="0" bIns="0" rtlCol="0" anchor="ctr"/>
+          <a:lstStyle/>
+          <a:p>
+            <a:pPr marL="0" indent="0">
+              <a:buNone/>
+            </a:pPr>
+            <a:r>
+              <a:rPr lang="en-US" sz="1300" b="1" dirty="0">
+                <a:solidFill>
+                  <a:srgbClr val="5B6472"/>
+                </a:solidFill>
+                <a:latin typeface="Calibri" pitchFamily="34" charset="0"/>
+                <a:ea typeface="Calibri" pitchFamily="34" charset="-122"/>
+                <a:cs typeface="Calibri" pitchFamily="34" charset="-120"/>
+              </a:rPr>
+              <a:t>UPCOMING</a:t>
+            </a:r>
+            <a:endParaRPr lang="en-US" sz="1300" dirty="0"/>
+          </a:p>
+        </p:txBody>
+      </p:sp>
+      <p:sp>
+        <p:nvSpPr>
+          <p:cNvPr id="23" name="Shape 21"/>
+          <p:cNvSpPr/>
+          <p:nvPr/>
+        </p:nvSpPr>
+        <p:spPr>
+          <a:xfrm>
+            <a:off x="6336792" y="4581144"/>
+            <a:ext cx="146304" cy="146304"/>
+          </a:xfrm>
+          <a:prstGeom prst="ellipse">
+            <a:avLst/>
+          </a:prstGeom>
+          <a:solidFill>
+            <a:srgbClr val="FFFFFF"/>
+          </a:solidFill>
+          <a:ln w="19050">
+            <a:solidFill>
+              <a:srgbClr val="8A94A6"/>
+            </a:solidFill>
+            <a:prstDash val="solid"/>
+          </a:ln>
+        </p:spPr>
+      </p:sp>
+      <p:sp>
+        <p:nvSpPr>
+          <p:cNvPr id="24" name="Text 22"/>
+          <p:cNvSpPr/>
+          <p:nvPr/>
+        </p:nvSpPr>
+        <p:spPr>
+          <a:xfrm>
+            <a:off x="6611112" y="4480560"/>
+            <a:ext cx="4389120" cy="502920"/>
+          </a:xfrm>
+          <a:prstGeom prst="rect">
+            <a:avLst/>
+          </a:prstGeom>
+          <a:noFill/>
+          <a:ln/>
+        </p:spPr>
+        <p:txBody>
+          <a:bodyPr wrap="square" lIns="0" tIns="0" rIns="0" bIns="0" rtlCol="0" anchor="ctr"/>
+          <a:lstStyle/>
+          <a:p>
+            <a:pPr marL="0" indent="0">
+              <a:buNone/>
+            </a:pPr>
+            <a:r>
+              <a:rPr lang="en-US" sz="1200" dirty="0">
+                <a:solidFill>
+                  <a:srgbClr val="12203A"/>
+                </a:solidFill>
+                <a:latin typeface="Calibri" pitchFamily="34" charset="0"/>
+                <a:ea typeface="Calibri" pitchFamily="34" charset="-122"/>
+                <a:cs typeface="Calibri" pitchFamily="34" charset="-120"/>
+              </a:rPr>
+              <a:t>Scale/region decisions from McCain — gate Prod sizing</a:t>
+            </a:r>
+            <a:endParaRPr lang="en-US" sz="1200" dirty="0"/>
+          </a:p>
+        </p:txBody>
+      </p:sp>
+      <p:sp>
+        <p:nvSpPr>
+          <p:cNvPr id="25" name="Shape 23"/>
+          <p:cNvSpPr/>
+          <p:nvPr/>
+        </p:nvSpPr>
+        <p:spPr>
+          <a:xfrm>
+            <a:off x="6336792" y="5184648"/>
+            <a:ext cx="146304" cy="146304"/>
+          </a:xfrm>
+          <a:prstGeom prst="ellipse">
+            <a:avLst/>
+          </a:prstGeom>
+          <a:solidFill>
+            <a:srgbClr val="FFFFFF"/>
+          </a:solidFill>
+          <a:ln w="19050">
+            <a:solidFill>
+              <a:srgbClr val="8A94A6"/>
+            </a:solidFill>
+            <a:prstDash val="solid"/>
+          </a:ln>
+        </p:spPr>
+      </p:sp>
+      <p:sp>
+        <p:nvSpPr>
+          <p:cNvPr id="26" name="Text 24"/>
+          <p:cNvSpPr/>
+          <p:nvPr/>
+        </p:nvSpPr>
+        <p:spPr>
+          <a:xfrm>
+            <a:off x="6611112" y="5084064"/>
+            <a:ext cx="4389120" cy="502920"/>
+          </a:xfrm>
+          <a:prstGeom prst="rect">
+            <a:avLst/>
+          </a:prstGeom>
+          <a:noFill/>
+          <a:ln/>
+        </p:spPr>
+        <p:txBody>
+          <a:bodyPr wrap="square" lIns="0" tIns="0" rIns="0" bIns="0" rtlCol="0" anchor="ctr"/>
+          <a:lstStyle/>
+          <a:p>
+            <a:pPr marL="0" indent="0">
+              <a:buNone/>
+            </a:pPr>
+            <a:r>
+              <a:rPr lang="en-US" sz="1200" dirty="0">
+                <a:solidFill>
+                  <a:srgbClr val="12203A"/>
+                </a:solidFill>
+                <a:latin typeface="Calibri" pitchFamily="34" charset="0"/>
+                <a:ea typeface="Calibri" pitchFamily="34" charset="-122"/>
+                <a:cs typeface="Calibri" pitchFamily="34" charset="-120"/>
+              </a:rPr>
+              <a:t>QA environment stand-up — owned by McCain's platform team</a:t>
+            </a:r>
+            <a:endParaRPr lang="en-US" sz="1200" dirty="0"/>
+          </a:p>
+        </p:txBody>
+      </p:sp>
+      <p:sp>
+        <p:nvSpPr>
+          <p:cNvPr id="27" name="Text 25"/>
+          <p:cNvSpPr/>
+          <p:nvPr/>
+        </p:nvSpPr>
+        <p:spPr>
+          <a:xfrm>
+            <a:off x="11505895" y="6400800"/>
+            <a:ext cx="457200" cy="274320"/>
+          </a:xfrm>
+          <a:prstGeom prst="rect">
+            <a:avLst/>
+          </a:prstGeom>
+          <a:noFill/>
+          <a:ln/>
+        </p:spPr>
+        <p:txBody>
+          <a:bodyPr wrap="square" lIns="0" tIns="0" rIns="0" bIns="0" rtlCol="0" anchor="ctr"/>
+          <a:lstStyle/>
+          <a:p>
+            <a:pPr marL="0" indent="0" algn="r">
+              <a:buNone/>
+            </a:pPr>
+            <a:r>
+              <a:rPr lang="en-US" sz="1000" dirty="0">
+                <a:solidFill>
+                  <a:srgbClr val="8A94A6"/>
+                </a:solidFill>
+                <a:latin typeface="Calibri" pitchFamily="34" charset="0"/>
+                <a:ea typeface="Calibri" pitchFamily="34" charset="-122"/>
+                <a:cs typeface="Calibri" pitchFamily="34" charset="-120"/>
+              </a:rPr>
+              <a:t>8</a:t>
+            </a:r>
+            <a:endParaRPr lang="en-US" sz="1000" dirty="0"/>
+          </a:p>
+        </p:txBody>
+      </p:sp>
+      <p:sp>
+        <p:nvSpPr>
+          <p:cNvPr id="28" name="Text 26"/>
+          <p:cNvSpPr/>
+          <p:nvPr/>
+        </p:nvSpPr>
+        <p:spPr>
+          <a:xfrm>
+            <a:off x="548640" y="6400800"/>
+            <a:ext cx="3657600" cy="274320"/>
+          </a:xfrm>
+          <a:prstGeom prst="rect">
+            <a:avLst/>
+          </a:prstGeom>
+          <a:noFill/>
+          <a:ln/>
+        </p:spPr>
+        <p:txBody>
+          <a:bodyPr wrap="square" lIns="0" tIns="0" rIns="0" bIns="0" rtlCol="0" anchor="ctr"/>
+          <a:lstStyle/>
+          <a:p>
+            <a:pPr marL="0" indent="0">
+              <a:buNone/>
+            </a:pPr>
+            <a:r>
+              <a:rPr lang="en-US" sz="1000" dirty="0">
+                <a:solidFill>
+                  <a:srgbClr val="8A94A6"/>
+                </a:solidFill>
+                <a:latin typeface="Calibri" pitchFamily="34" charset="0"/>
+                <a:ea typeface="Calibri" pitchFamily="34" charset="-122"/>
+                <a:cs typeface="Calibri" pitchFamily="34" charset="-120"/>
+              </a:rPr>
+              <a:t>McCain · Agentic Order Status</a:t>
+            </a:r>
+            <a:endParaRPr lang="en-US" sz="1000" dirty="0"/>
+          </a:p>
+        </p:txBody>
+      </p:sp>
+    </p:spTree>
+  </p:cSld>
+  <p:clrMapOvr>
+    <a:masterClrMapping/>
+  </p:clrMapOvr>
+</p:sld>
+</file>
+
+<file path=ppt/slides/slide11.xml><?xml version="1.0" encoding="utf-8"?>
+<p:sld xmlns:a="http://schemas.openxmlformats.org/drawingml/2006/main" xmlns:r="http://schemas.openxmlformats.org/officeDocument/2006/relationships" xmlns:p="http://schemas.openxmlformats.org/presentationml/2006/main">
+  <p:cSld name="Slide 9">
+    <p:bg>
+      <p:bgPr>
+        <a:solidFill>
+          <a:srgbClr val="FFFFFF"/>
+        </a:solidFill>
+        <a:effectLst/>
+      </p:bgPr>
+    </p:bg>
+    <p:spTree>
+      <p:nvGrpSpPr>
+        <p:cNvPr id="1" name=""/>
+        <p:cNvGrpSpPr/>
+        <p:nvPr/>
+      </p:nvGrpSpPr>
+      <p:grpSpPr>
+        <a:xfrm>
+          <a:off x="0" y="0"/>
+          <a:ext cx="0" cy="0"/>
+          <a:chOff x="0" y="0"/>
+          <a:chExt cx="0" cy="0"/>
+        </a:xfrm>
+      </p:grpSpPr>
+      <p:sp>
+        <p:nvSpPr>
+          <p:cNvPr id="2" name="Text 0"/>
+          <p:cNvSpPr/>
+          <p:nvPr/>
+        </p:nvSpPr>
+        <p:spPr>
+          <a:xfrm>
+            <a:off x="548640" y="384048"/>
+            <a:ext cx="7315200" cy="274320"/>
+          </a:xfrm>
+          <a:prstGeom prst="rect">
+            <a:avLst/>
+          </a:prstGeom>
+          <a:noFill/>
+          <a:ln/>
+        </p:spPr>
+        <p:txBody>
+          <a:bodyPr wrap="square" lIns="0" tIns="0" rIns="0" bIns="0" rtlCol="0" anchor="ctr"/>
+          <a:lstStyle/>
+          <a:p>
+            <a:pPr marL="0" indent="0">
+              <a:buNone/>
+            </a:pPr>
+            <a:r>
+              <a:rPr lang="en-US" sz="1200" b="1" kern="0" spc="200" dirty="0">
+                <a:solidFill>
+                  <a:srgbClr val="FF3621"/>
+                </a:solidFill>
+                <a:latin typeface="Calibri" pitchFamily="34" charset="0"/>
+                <a:ea typeface="Calibri" pitchFamily="34" charset="-122"/>
+                <a:cs typeface="Calibri" pitchFamily="34" charset="-120"/>
+              </a:rPr>
+              <a:t>NEXT STEPS</a:t>
+            </a:r>
+            <a:endParaRPr lang="en-US" sz="1200" dirty="0"/>
+          </a:p>
+        </p:txBody>
+      </p:sp>
+      <p:sp>
+        <p:nvSpPr>
+          <p:cNvPr id="3" name="Text 1"/>
+          <p:cNvSpPr/>
+          <p:nvPr/>
+        </p:nvSpPr>
+        <p:spPr>
+          <a:xfrm>
+            <a:off x="548640" y="658368"/>
+            <a:ext cx="10515600" cy="822960"/>
+          </a:xfrm>
+          <a:prstGeom prst="rect">
+            <a:avLst/>
+          </a:prstGeom>
+          <a:noFill/>
+          <a:ln/>
+        </p:spPr>
+        <p:txBody>
+          <a:bodyPr wrap="square" lIns="0" tIns="0" rIns="0" bIns="0" rtlCol="0" anchor="ctr"/>
+          <a:lstStyle/>
+          <a:p>
+            <a:pPr marL="0" indent="0">
+              <a:buNone/>
+            </a:pPr>
+            <a:r>
+              <a:rPr lang="en-US" sz="3000" b="1" dirty="0">
+                <a:solidFill>
+                  <a:srgbClr val="12203A"/>
+                </a:solidFill>
+                <a:latin typeface="Cambria" pitchFamily="34" charset="0"/>
+                <a:ea typeface="Cambria" pitchFamily="34" charset="-122"/>
+                <a:cs typeface="Cambria" pitchFamily="34" charset="-120"/>
+              </a:rPr>
+              <a:t>What happens next</a:t>
+            </a:r>
+            <a:endParaRPr lang="en-US" sz="3000" dirty="0"/>
+          </a:p>
+        </p:txBody>
+      </p:sp>
+      <p:sp>
+        <p:nvSpPr>
+          <p:cNvPr id="4" name="Shape 2"/>
+          <p:cNvSpPr/>
+          <p:nvPr/>
+        </p:nvSpPr>
+        <p:spPr>
+          <a:xfrm>
+            <a:off x="640080" y="1920240"/>
+            <a:ext cx="502920" cy="502920"/>
+          </a:xfrm>
+          <a:prstGeom prst="ellipse">
+            <a:avLst/>
+          </a:prstGeom>
+          <a:solidFill>
+            <a:srgbClr val="FF3621"/>
+          </a:solidFill>
+          <a:ln/>
+        </p:spPr>
+      </p:sp>
+      <p:sp>
+        <p:nvSpPr>
+          <p:cNvPr id="5" name="Text 3"/>
+          <p:cNvSpPr/>
+          <p:nvPr/>
+        </p:nvSpPr>
+        <p:spPr>
+          <a:xfrm>
+            <a:off x="640080" y="1920240"/>
+            <a:ext cx="502920" cy="502920"/>
+          </a:xfrm>
+          <a:prstGeom prst="rect">
+            <a:avLst/>
+          </a:prstGeom>
+          <a:noFill/>
+          <a:ln/>
+        </p:spPr>
+        <p:txBody>
+          <a:bodyPr wrap="square" lIns="0" tIns="0" rIns="0" bIns="0" rtlCol="0" anchor="ctr"/>
+          <a:lstStyle/>
+          <a:p>
+            <a:pPr marL="0" indent="0" algn="ctr">
+              <a:buNone/>
+            </a:pPr>
+            <a:r>
+              <a:rPr lang="en-US" sz="1500" b="1" dirty="0">
+                <a:solidFill>
+                  <a:srgbClr val="FFFFFF"/>
+                </a:solidFill>
+                <a:latin typeface="Cambria" pitchFamily="34" charset="0"/>
+                <a:ea typeface="Cambria" pitchFamily="34" charset="-122"/>
+                <a:cs typeface="Cambria" pitchFamily="34" charset="-120"/>
+              </a:rPr>
+              <a:t>1</a:t>
+            </a:r>
+            <a:endParaRPr lang="en-US" sz="1500" dirty="0"/>
+          </a:p>
+        </p:txBody>
+      </p:sp>
+      <p:sp>
+        <p:nvSpPr>
+          <p:cNvPr id="6" name="Text 4"/>
+          <p:cNvSpPr/>
+          <p:nvPr/>
+        </p:nvSpPr>
+        <p:spPr>
+          <a:xfrm>
+            <a:off x="1417320" y="1874520"/>
+            <a:ext cx="2834640" cy="548640"/>
+          </a:xfrm>
+          <a:prstGeom prst="rect">
+            <a:avLst/>
+          </a:prstGeom>
+          <a:noFill/>
+          <a:ln/>
+        </p:spPr>
+        <p:txBody>
+          <a:bodyPr wrap="square" lIns="0" tIns="0" rIns="0" bIns="0" rtlCol="0" anchor="ctr"/>
+          <a:lstStyle/>
+          <a:p>
+            <a:pPr marL="0" indent="0">
+              <a:buNone/>
+            </a:pPr>
+            <a:r>
+              <a:rPr lang="en-US" sz="1600" b="1" dirty="0">
+                <a:solidFill>
+                  <a:srgbClr val="12203A"/>
+                </a:solidFill>
+                <a:latin typeface="Cambria" pitchFamily="34" charset="0"/>
+                <a:ea typeface="Cambria" pitchFamily="34" charset="-122"/>
+                <a:cs typeface="Cambria" pitchFamily="34" charset="-120"/>
+              </a:rPr>
+              <a:t>Finish Sprint 1</a:t>
+            </a:r>
+            <a:endParaRPr lang="en-US" sz="1600" dirty="0"/>
+          </a:p>
+        </p:txBody>
+      </p:sp>
+      <p:sp>
+        <p:nvSpPr>
+          <p:cNvPr id="7" name="Text 5"/>
+          <p:cNvSpPr/>
+          <p:nvPr/>
+        </p:nvSpPr>
+        <p:spPr>
+          <a:xfrm>
+            <a:off x="4434840" y="1874520"/>
+            <a:ext cx="6949440" cy="640080"/>
+          </a:xfrm>
+          <a:prstGeom prst="rect">
+            <a:avLst/>
+          </a:prstGeom>
+          <a:noFill/>
+          <a:ln/>
+        </p:spPr>
+        <p:txBody>
+          <a:bodyPr wrap="square" lIns="0" tIns="0" rIns="0" bIns="0" rtlCol="0" anchor="ctr"/>
+          <a:lstStyle/>
+          <a:p>
+            <a:pPr marL="0" indent="0">
+              <a:buNone/>
+            </a:pPr>
+            <a:r>
+              <a:rPr lang="en-US" sz="1300" dirty="0">
+                <a:solidFill>
+                  <a:srgbClr val="5B6472"/>
+                </a:solidFill>
+                <a:latin typeface="Calibri" pitchFamily="34" charset="0"/>
+                <a:ea typeface="Calibri" pitchFamily="34" charset="-122"/>
+                <a:cs typeface="Calibri" pitchFamily="34" charset="-120"/>
+              </a:rPr>
+              <a:t>Complete the Order Status flagship build and pass the 44-test evaluation gate by 11 Aug.</a:t>
+            </a:r>
+            <a:endParaRPr lang="en-US" sz="1300" dirty="0"/>
+          </a:p>
+        </p:txBody>
+      </p:sp>
+      <p:sp>
+        <p:nvSpPr>
+          <p:cNvPr id="8" name="Shape 6"/>
+          <p:cNvSpPr/>
+          <p:nvPr/>
+        </p:nvSpPr>
+        <p:spPr>
+          <a:xfrm>
+            <a:off x="891540" y="2423160"/>
+            <a:ext cx="0" cy="548640"/>
+          </a:xfrm>
+          <a:prstGeom prst="line">
+            <a:avLst/>
+          </a:prstGeom>
+          <a:noFill/>
+          <a:ln w="19050">
+            <a:solidFill>
+              <a:srgbClr val="E1E5EE"/>
+            </a:solidFill>
+            <a:prstDash val="solid"/>
+          </a:ln>
+        </p:spPr>
+      </p:sp>
+      <p:sp>
+        <p:nvSpPr>
+          <p:cNvPr id="9" name="Shape 7"/>
+          <p:cNvSpPr/>
+          <p:nvPr/>
+        </p:nvSpPr>
+        <p:spPr>
+          <a:xfrm>
+            <a:off x="640080" y="2971800"/>
+            <a:ext cx="502920" cy="502920"/>
+          </a:xfrm>
+          <a:prstGeom prst="ellipse">
+            <a:avLst/>
+          </a:prstGeom>
+          <a:solidFill>
+            <a:srgbClr val="FF3621"/>
+          </a:solidFill>
+          <a:ln/>
+        </p:spPr>
+      </p:sp>
+      <p:sp>
+        <p:nvSpPr>
+          <p:cNvPr id="10" name="Text 8"/>
+          <p:cNvSpPr/>
+          <p:nvPr/>
+        </p:nvSpPr>
+        <p:spPr>
+          <a:xfrm>
+            <a:off x="640080" y="2971800"/>
+            <a:ext cx="502920" cy="502920"/>
+          </a:xfrm>
+          <a:prstGeom prst="rect">
+            <a:avLst/>
+          </a:prstGeom>
+          <a:noFill/>
+          <a:ln/>
+        </p:spPr>
+        <p:txBody>
+          <a:bodyPr wrap="square" lIns="0" tIns="0" rIns="0" bIns="0" rtlCol="0" anchor="ctr"/>
+          <a:lstStyle/>
+          <a:p>
+            <a:pPr marL="0" indent="0" algn="ctr">
+              <a:buNone/>
+            </a:pPr>
+            <a:r>
+              <a:rPr lang="en-US" sz="1500" b="1" dirty="0">
+                <a:solidFill>
+                  <a:srgbClr val="FFFFFF"/>
+                </a:solidFill>
+                <a:latin typeface="Cambria" pitchFamily="34" charset="0"/>
+                <a:ea typeface="Cambria" pitchFamily="34" charset="-122"/>
+                <a:cs typeface="Cambria" pitchFamily="34" charset="-120"/>
+              </a:rPr>
+              <a:t>2</a:t>
+            </a:r>
+            <a:endParaRPr lang="en-US" sz="1500" dirty="0"/>
+          </a:p>
+        </p:txBody>
+      </p:sp>
+      <p:sp>
+        <p:nvSpPr>
+          <p:cNvPr id="11" name="Text 9"/>
+          <p:cNvSpPr/>
+          <p:nvPr/>
+        </p:nvSpPr>
+        <p:spPr>
+          <a:xfrm>
+            <a:off x="1417320" y="2926080"/>
+            <a:ext cx="2834640" cy="548640"/>
+          </a:xfrm>
+          <a:prstGeom prst="rect">
+            <a:avLst/>
+          </a:prstGeom>
+          <a:noFill/>
+          <a:ln/>
+        </p:spPr>
+        <p:txBody>
+          <a:bodyPr wrap="square" lIns="0" tIns="0" rIns="0" bIns="0" rtlCol="0" anchor="ctr"/>
+          <a:lstStyle/>
+          <a:p>
+            <a:pPr marL="0" indent="0">
+              <a:buNone/>
+            </a:pPr>
+            <a:r>
+              <a:rPr lang="en-US" sz="1600" b="1" dirty="0">
+                <a:solidFill>
+                  <a:srgbClr val="12203A"/>
+                </a:solidFill>
+                <a:latin typeface="Cambria" pitchFamily="34" charset="0"/>
+                <a:ea typeface="Cambria" pitchFamily="34" charset="-122"/>
+                <a:cs typeface="Cambria" pitchFamily="34" charset="-120"/>
+              </a:rPr>
+              <a:t>Internal demo</a:t>
+            </a:r>
+            <a:endParaRPr lang="en-US" sz="1600" dirty="0"/>
+          </a:p>
+        </p:txBody>
+      </p:sp>
+      <p:sp>
+        <p:nvSpPr>
+          <p:cNvPr id="12" name="Text 10"/>
+          <p:cNvSpPr/>
+          <p:nvPr/>
+        </p:nvSpPr>
+        <p:spPr>
+          <a:xfrm>
+            <a:off x="4434840" y="2926080"/>
+            <a:ext cx="6949440" cy="640080"/>
+          </a:xfrm>
+          <a:prstGeom prst="rect">
+            <a:avLst/>
+          </a:prstGeom>
+          <a:noFill/>
+          <a:ln/>
+        </p:spPr>
+        <p:txBody>
+          <a:bodyPr wrap="square" lIns="0" tIns="0" rIns="0" bIns="0" rtlCol="0" anchor="ctr"/>
+          <a:lstStyle/>
+          <a:p>
+            <a:pPr marL="0" indent="0">
+              <a:buNone/>
+            </a:pPr>
+            <a:r>
+              <a:rPr lang="en-US" sz="1300" dirty="0">
+                <a:solidFill>
+                  <a:srgbClr val="5B6472"/>
+                </a:solidFill>
+                <a:latin typeface="Calibri" pitchFamily="34" charset="0"/>
+                <a:ea typeface="Calibri" pitchFamily="34" charset="-122"/>
+                <a:cs typeface="Calibri" pitchFamily="34" charset="-120"/>
+              </a:rPr>
+              <a:t>Walk through the working Order Status assistant — all 8 order states, guardrails and citations.</a:t>
+            </a:r>
+            <a:endParaRPr lang="en-US" sz="1300" dirty="0"/>
+          </a:p>
+        </p:txBody>
+      </p:sp>
+      <p:sp>
+        <p:nvSpPr>
+          <p:cNvPr id="13" name="Shape 11"/>
+          <p:cNvSpPr/>
+          <p:nvPr/>
+        </p:nvSpPr>
+        <p:spPr>
+          <a:xfrm>
+            <a:off x="891540" y="3474720"/>
+            <a:ext cx="0" cy="548640"/>
+          </a:xfrm>
+          <a:prstGeom prst="line">
+            <a:avLst/>
+          </a:prstGeom>
+          <a:noFill/>
+          <a:ln w="19050">
+            <a:solidFill>
+              <a:srgbClr val="E1E5EE"/>
+            </a:solidFill>
+            <a:prstDash val="solid"/>
+          </a:ln>
+        </p:spPr>
+      </p:sp>
+      <p:sp>
+        <p:nvSpPr>
+          <p:cNvPr id="14" name="Shape 12"/>
+          <p:cNvSpPr/>
+          <p:nvPr/>
+        </p:nvSpPr>
+        <p:spPr>
+          <a:xfrm>
+            <a:off x="640080" y="4023360"/>
+            <a:ext cx="502920" cy="502920"/>
+          </a:xfrm>
+          <a:prstGeom prst="ellipse">
+            <a:avLst/>
+          </a:prstGeom>
+          <a:solidFill>
+            <a:srgbClr val="FF3621"/>
+          </a:solidFill>
+          <a:ln/>
+        </p:spPr>
+      </p:sp>
+      <p:sp>
+        <p:nvSpPr>
+          <p:cNvPr id="15" name="Text 13"/>
+          <p:cNvSpPr/>
+          <p:nvPr/>
+        </p:nvSpPr>
+        <p:spPr>
+          <a:xfrm>
+            <a:off x="640080" y="4023360"/>
+            <a:ext cx="502920" cy="502920"/>
+          </a:xfrm>
+          <a:prstGeom prst="rect">
+            <a:avLst/>
+          </a:prstGeom>
+          <a:noFill/>
+          <a:ln/>
+        </p:spPr>
+        <p:txBody>
+          <a:bodyPr wrap="square" lIns="0" tIns="0" rIns="0" bIns="0" rtlCol="0" anchor="ctr"/>
+          <a:lstStyle/>
+          <a:p>
+            <a:pPr marL="0" indent="0" algn="ctr">
+              <a:buNone/>
+            </a:pPr>
+            <a:r>
+              <a:rPr lang="en-US" sz="1500" b="1" dirty="0">
+                <a:solidFill>
+                  <a:srgbClr val="FFFFFF"/>
+                </a:solidFill>
+                <a:latin typeface="Cambria" pitchFamily="34" charset="0"/>
+                <a:ea typeface="Cambria" pitchFamily="34" charset="-122"/>
+                <a:cs typeface="Cambria" pitchFamily="34" charset="-120"/>
+              </a:rPr>
+              <a:t>3</a:t>
+            </a:r>
+            <a:endParaRPr lang="en-US" sz="1500" dirty="0"/>
+          </a:p>
+        </p:txBody>
+      </p:sp>
+      <p:sp>
+        <p:nvSpPr>
+          <p:cNvPr id="16" name="Text 14"/>
+          <p:cNvSpPr/>
+          <p:nvPr/>
+        </p:nvSpPr>
+        <p:spPr>
+          <a:xfrm>
+            <a:off x="1417320" y="3977640"/>
+            <a:ext cx="2834640" cy="548640"/>
+          </a:xfrm>
+          <a:prstGeom prst="rect">
+            <a:avLst/>
+          </a:prstGeom>
+          <a:noFill/>
+          <a:ln/>
+        </p:spPr>
+        <p:txBody>
+          <a:bodyPr wrap="square" lIns="0" tIns="0" rIns="0" bIns="0" rtlCol="0" anchor="ctr"/>
+          <a:lstStyle/>
+          <a:p>
+            <a:pPr marL="0" indent="0">
+              <a:buNone/>
+            </a:pPr>
+            <a:r>
+              <a:rPr lang="en-US" sz="1600" b="1" dirty="0">
+                <a:solidFill>
+                  <a:srgbClr val="12203A"/>
+                </a:solidFill>
+                <a:latin typeface="Cambria" pitchFamily="34" charset="0"/>
+                <a:ea typeface="Cambria" pitchFamily="34" charset="-122"/>
+                <a:cs typeface="Cambria" pitchFamily="34" charset="-120"/>
+              </a:rPr>
+              <a:t>Start Sprint 2</a:t>
+            </a:r>
+            <a:endParaRPr lang="en-US" sz="1600" dirty="0"/>
+          </a:p>
+        </p:txBody>
+      </p:sp>
+      <p:sp>
+        <p:nvSpPr>
+          <p:cNvPr id="17" name="Text 15"/>
+          <p:cNvSpPr/>
+          <p:nvPr/>
+        </p:nvSpPr>
+        <p:spPr>
+          <a:xfrm>
+            <a:off x="4434840" y="3977640"/>
+            <a:ext cx="6949440" cy="640080"/>
+          </a:xfrm>
+          <a:prstGeom prst="rect">
+            <a:avLst/>
+          </a:prstGeom>
+          <a:noFill/>
+          <a:ln/>
+        </p:spPr>
+        <p:txBody>
+          <a:bodyPr wrap="square" lIns="0" tIns="0" rIns="0" bIns="0" rtlCol="0" anchor="ctr"/>
+          <a:lstStyle/>
+          <a:p>
+            <a:pPr marL="0" indent="0">
+              <a:buNone/>
+            </a:pPr>
+            <a:r>
+              <a:rPr lang="en-US" sz="1300" dirty="0">
+                <a:solidFill>
+                  <a:srgbClr val="5B6472"/>
+                </a:solidFill>
+                <a:latin typeface="Calibri" pitchFamily="34" charset="0"/>
+                <a:ea typeface="Calibri" pitchFamily="34" charset="-122"/>
+                <a:cs typeface="Calibri" pitchFamily="34" charset="-120"/>
+              </a:rPr>
+              <a:t>Scheduling &amp; holds cluster begins 12 Aug, on the same 2-week cadence.</a:t>
+            </a:r>
+            <a:endParaRPr lang="en-US" sz="1300" dirty="0"/>
+          </a:p>
+        </p:txBody>
+      </p:sp>
+      <p:sp>
+        <p:nvSpPr>
+          <p:cNvPr id="18" name="Text 16"/>
+          <p:cNvSpPr/>
+          <p:nvPr/>
+        </p:nvSpPr>
+        <p:spPr>
+          <a:xfrm>
+            <a:off x="11505895" y="6400800"/>
+            <a:ext cx="457200" cy="274320"/>
+          </a:xfrm>
+          <a:prstGeom prst="rect">
+            <a:avLst/>
+          </a:prstGeom>
+          <a:noFill/>
+          <a:ln/>
+        </p:spPr>
+        <p:txBody>
+          <a:bodyPr wrap="square" lIns="0" tIns="0" rIns="0" bIns="0" rtlCol="0" anchor="ctr"/>
+          <a:lstStyle/>
+          <a:p>
+            <a:pPr marL="0" indent="0" algn="r">
+              <a:buNone/>
+            </a:pPr>
+            <a:r>
+              <a:rPr lang="en-US" sz="1000" dirty="0">
+                <a:solidFill>
+                  <a:srgbClr val="8A94A6"/>
+                </a:solidFill>
+                <a:latin typeface="Calibri" pitchFamily="34" charset="0"/>
+                <a:ea typeface="Calibri" pitchFamily="34" charset="-122"/>
+                <a:cs typeface="Calibri" pitchFamily="34" charset="-120"/>
+              </a:rPr>
+              <a:t>9</a:t>
+            </a:r>
+            <a:endParaRPr lang="en-US" sz="1000" dirty="0"/>
+          </a:p>
+        </p:txBody>
+      </p:sp>
+      <p:sp>
+        <p:nvSpPr>
+          <p:cNvPr id="19" name="Text 17"/>
+          <p:cNvSpPr/>
+          <p:nvPr/>
+        </p:nvSpPr>
+        <p:spPr>
+          <a:xfrm>
+            <a:off x="548640" y="6400800"/>
+            <a:ext cx="3657600" cy="274320"/>
+          </a:xfrm>
+          <a:prstGeom prst="rect">
+            <a:avLst/>
+          </a:prstGeom>
+          <a:noFill/>
+          <a:ln/>
+        </p:spPr>
+        <p:txBody>
+          <a:bodyPr wrap="square" lIns="0" tIns="0" rIns="0" bIns="0" rtlCol="0" anchor="ctr"/>
+          <a:lstStyle/>
+          <a:p>
+            <a:pPr marL="0" indent="0">
+              <a:buNone/>
+            </a:pPr>
+            <a:r>
+              <a:rPr lang="en-US" sz="1000" dirty="0">
+                <a:solidFill>
+                  <a:srgbClr val="8A94A6"/>
+                </a:solidFill>
+                <a:latin typeface="Calibri" pitchFamily="34" charset="0"/>
+                <a:ea typeface="Calibri" pitchFamily="34" charset="-122"/>
+                <a:cs typeface="Calibri" pitchFamily="34" charset="-120"/>
+              </a:rPr>
+              <a:t>McCain · Agentic Order Status</a:t>
+            </a:r>
+            <a:endParaRPr lang="en-US" sz="1000" dirty="0"/>
+          </a:p>
+        </p:txBody>
+      </p:sp>
+    </p:spTree>
+  </p:cSld>
+  <p:clrMapOvr>
+    <a:masterClrMapping/>
+  </p:clrMapOvr>
+</p:sld>
+</file>
+
+<file path=ppt/slides/slide12.xml><?xml version="1.0" encoding="utf-8"?>
 <p:sld xmlns:a="http://schemas.openxmlformats.org/drawingml/2006/main" xmlns:r="http://schemas.openxmlformats.org/officeDocument/2006/relationships" xmlns:p="http://schemas.openxmlformats.org/presentationml/2006/main">
   <p:cSld name="Slide 10">
     <p:bg>
@@ -1809,6 +3636,17 @@
               <a:buNone/>
             </a:pPr>
             <a:r>
+              <a:rPr lang="en-US" sz="1300" b="1" dirty="0" err="1">
+                <a:solidFill>
+                  <a:srgbClr val="FFFFFF"/>
+                </a:solidFill>
+                <a:latin typeface="Calibri" pitchFamily="34" charset="0"/>
+                <a:ea typeface="Calibri" pitchFamily="34" charset="-122"/>
+                <a:cs typeface="Calibri" pitchFamily="34" charset="-120"/>
+              </a:rPr>
+              <a:t>Mccain</a:t>
+            </a:r>
+            <a:r>
               <a:rPr lang="en-US" sz="1300" b="1" dirty="0">
                 <a:solidFill>
                   <a:srgbClr val="FFFFFF"/>
@@ -1817,9 +3655,8 @@
                 <a:ea typeface="Calibri" pitchFamily="34" charset="-122"/>
                 <a:cs typeface="Calibri" pitchFamily="34" charset="-120"/>
               </a:rPr>
-              <a:t>Alok Ranjan</a:t>
-            </a:r>
-            <a:endParaRPr lang="en-US" sz="1300" dirty="0"/>
+              <a:t> Meridian </a:t>
+            </a:r>
           </a:p>
           <a:p>
             <a:pPr marL="0" indent="0">
@@ -1837,9 +3674,8 @@
                 <a:ea typeface="Calibri" pitchFamily="34" charset="-122"/>
                 <a:cs typeface="Calibri" pitchFamily="34" charset="-120"/>
               </a:rPr>
-              <a:t>StatusNeo — Forward Deployed Engineering</a:t>
-            </a:r>
-            <a:endParaRPr lang="en-US" sz="1300" dirty="0"/>
+              <a:t>Dev Team</a:t>
+            </a:r>
           </a:p>
         </p:txBody>
       </p:sp>
@@ -6418,6 +8254,334 @@
 
 <file path=ppt/slides/slide6.xml><?xml version="1.0" encoding="utf-8"?>
 <p:sld xmlns:a="http://schemas.openxmlformats.org/drawingml/2006/main" xmlns:r="http://schemas.openxmlformats.org/officeDocument/2006/relationships" xmlns:p="http://schemas.openxmlformats.org/presentationml/2006/main">
+  <p:cSld>
+    <p:bg>
+      <p:bgPr>
+        <a:solidFill>
+          <a:srgbClr val="FFFFFF"/>
+        </a:solidFill>
+        <a:effectLst/>
+      </p:bgPr>
+    </p:bg>
+    <p:spTree>
+      <p:nvGrpSpPr>
+        <p:cNvPr id="1" name="">
+          <a:extLst>
+            <a:ext uri="{FF2B5EF4-FFF2-40B4-BE49-F238E27FC236}">
+              <a16:creationId xmlns:a16="http://schemas.microsoft.com/office/drawing/2014/main" id="{482E3D26-CE98-F9FD-DBB4-79272661DB68}"/>
+            </a:ext>
+          </a:extLst>
+        </p:cNvPr>
+        <p:cNvGrpSpPr/>
+        <p:nvPr/>
+      </p:nvGrpSpPr>
+      <p:grpSpPr>
+        <a:xfrm>
+          <a:off x="0" y="0"/>
+          <a:ext cx="0" cy="0"/>
+          <a:chOff x="0" y="0"/>
+          <a:chExt cx="0" cy="0"/>
+        </a:xfrm>
+      </p:grpSpPr>
+      <p:sp>
+        <p:nvSpPr>
+          <p:cNvPr id="2" name="Text 0">
+            <a:extLst>
+              <a:ext uri="{FF2B5EF4-FFF2-40B4-BE49-F238E27FC236}">
+                <a16:creationId xmlns:a16="http://schemas.microsoft.com/office/drawing/2014/main" id="{51C3613B-4DD6-6096-6F9B-DAA3A2F660B2}"/>
+              </a:ext>
+            </a:extLst>
+          </p:cNvPr>
+          <p:cNvSpPr/>
+          <p:nvPr/>
+        </p:nvSpPr>
+        <p:spPr>
+          <a:xfrm>
+            <a:off x="548640" y="384048"/>
+            <a:ext cx="7315200" cy="274320"/>
+          </a:xfrm>
+          <a:prstGeom prst="rect">
+            <a:avLst/>
+          </a:prstGeom>
+          <a:noFill/>
+          <a:ln/>
+        </p:spPr>
+        <p:txBody>
+          <a:bodyPr wrap="square" lIns="0" tIns="0" rIns="0" bIns="0" rtlCol="0" anchor="ctr"/>
+          <a:lstStyle/>
+          <a:p>
+            <a:pPr marL="0" indent="0">
+              <a:buNone/>
+            </a:pPr>
+            <a:r>
+              <a:rPr lang="en-US" sz="1200" b="1" kern="0" spc="200" dirty="0">
+                <a:solidFill>
+                  <a:srgbClr val="FF3621"/>
+                </a:solidFill>
+                <a:latin typeface="Calibri" pitchFamily="34" charset="0"/>
+                <a:ea typeface="Calibri" pitchFamily="34" charset="-122"/>
+                <a:cs typeface="Calibri" pitchFamily="34" charset="-120"/>
+              </a:rPr>
+              <a:t>ARCHITECTURE — REQUEST FLOW</a:t>
+            </a:r>
+            <a:endParaRPr lang="en-US" sz="1200" dirty="0"/>
+          </a:p>
+        </p:txBody>
+      </p:sp>
+      <p:sp>
+        <p:nvSpPr>
+          <p:cNvPr id="3" name="Text 1">
+            <a:extLst>
+              <a:ext uri="{FF2B5EF4-FFF2-40B4-BE49-F238E27FC236}">
+                <a16:creationId xmlns:a16="http://schemas.microsoft.com/office/drawing/2014/main" id="{D8A5FE3A-E056-7ACE-8666-A23D312061C8}"/>
+              </a:ext>
+            </a:extLst>
+          </p:cNvPr>
+          <p:cNvSpPr/>
+          <p:nvPr/>
+        </p:nvSpPr>
+        <p:spPr>
+          <a:xfrm>
+            <a:off x="548640" y="658368"/>
+            <a:ext cx="11064240" cy="320040"/>
+          </a:xfrm>
+          <a:prstGeom prst="rect">
+            <a:avLst/>
+          </a:prstGeom>
+          <a:noFill/>
+          <a:ln/>
+        </p:spPr>
+        <p:txBody>
+          <a:bodyPr wrap="square" lIns="0" tIns="0" rIns="0" bIns="0" rtlCol="0" anchor="ctr"/>
+          <a:lstStyle/>
+          <a:p>
+            <a:pPr marL="0" indent="0">
+              <a:buNone/>
+            </a:pPr>
+            <a:r>
+              <a:rPr lang="en-US" sz="1200" i="1" dirty="0">
+                <a:solidFill>
+                  <a:srgbClr val="5B6472"/>
+                </a:solidFill>
+                <a:latin typeface="Calibri" pitchFamily="34" charset="0"/>
+                <a:ea typeface="Calibri" pitchFamily="34" charset="-122"/>
+                <a:cs typeface="Calibri" pitchFamily="34" charset="-120"/>
+              </a:rPr>
+              <a:t>Proven at McCain today — adapted from the Supply Chain Assistant's Promptflow + Genie pattern, with RBAC scoped from day one.</a:t>
+            </a:r>
+            <a:endParaRPr lang="en-US" sz="1200" dirty="0"/>
+          </a:p>
+        </p:txBody>
+      </p:sp>
+      <p:sp>
+        <p:nvSpPr>
+          <p:cNvPr id="5" name="Text 2">
+            <a:extLst>
+              <a:ext uri="{FF2B5EF4-FFF2-40B4-BE49-F238E27FC236}">
+                <a16:creationId xmlns:a16="http://schemas.microsoft.com/office/drawing/2014/main" id="{4B68AD5C-C4E0-7C9B-1483-85AA63076C79}"/>
+              </a:ext>
+            </a:extLst>
+          </p:cNvPr>
+          <p:cNvSpPr/>
+          <p:nvPr/>
+        </p:nvSpPr>
+        <p:spPr>
+          <a:xfrm>
+            <a:off x="11505895" y="6400800"/>
+            <a:ext cx="457200" cy="274320"/>
+          </a:xfrm>
+          <a:prstGeom prst="rect">
+            <a:avLst/>
+          </a:prstGeom>
+          <a:noFill/>
+          <a:ln/>
+        </p:spPr>
+        <p:txBody>
+          <a:bodyPr wrap="square" lIns="0" tIns="0" rIns="0" bIns="0" rtlCol="0" anchor="ctr"/>
+          <a:lstStyle/>
+          <a:p>
+            <a:pPr marL="0" indent="0" algn="r">
+              <a:buNone/>
+            </a:pPr>
+            <a:r>
+              <a:rPr lang="en-US" sz="1000" dirty="0">
+                <a:solidFill>
+                  <a:srgbClr val="8A94A6"/>
+                </a:solidFill>
+                <a:latin typeface="Calibri" pitchFamily="34" charset="0"/>
+                <a:ea typeface="Calibri" pitchFamily="34" charset="-122"/>
+                <a:cs typeface="Calibri" pitchFamily="34" charset="-120"/>
+              </a:rPr>
+              <a:t>5</a:t>
+            </a:r>
+            <a:endParaRPr lang="en-US" sz="1000" dirty="0"/>
+          </a:p>
+        </p:txBody>
+      </p:sp>
+      <p:sp>
+        <p:nvSpPr>
+          <p:cNvPr id="6" name="Text 3">
+            <a:extLst>
+              <a:ext uri="{FF2B5EF4-FFF2-40B4-BE49-F238E27FC236}">
+                <a16:creationId xmlns:a16="http://schemas.microsoft.com/office/drawing/2014/main" id="{80F20ED6-12B6-1E78-D79E-CCD9EBF50FA3}"/>
+              </a:ext>
+            </a:extLst>
+          </p:cNvPr>
+          <p:cNvSpPr/>
+          <p:nvPr/>
+        </p:nvSpPr>
+        <p:spPr>
+          <a:xfrm>
+            <a:off x="548640" y="6400800"/>
+            <a:ext cx="3657600" cy="274320"/>
+          </a:xfrm>
+          <a:prstGeom prst="rect">
+            <a:avLst/>
+          </a:prstGeom>
+          <a:noFill/>
+          <a:ln/>
+        </p:spPr>
+        <p:txBody>
+          <a:bodyPr wrap="square" lIns="0" tIns="0" rIns="0" bIns="0" rtlCol="0" anchor="ctr"/>
+          <a:lstStyle/>
+          <a:p>
+            <a:pPr marL="0" indent="0">
+              <a:buNone/>
+            </a:pPr>
+            <a:r>
+              <a:rPr lang="en-US" sz="1000" dirty="0">
+                <a:solidFill>
+                  <a:srgbClr val="8A94A6"/>
+                </a:solidFill>
+                <a:latin typeface="Calibri" pitchFamily="34" charset="0"/>
+                <a:ea typeface="Calibri" pitchFamily="34" charset="-122"/>
+                <a:cs typeface="Calibri" pitchFamily="34" charset="-120"/>
+              </a:rPr>
+              <a:t>McCain · Agentic Order Status</a:t>
+            </a:r>
+            <a:endParaRPr lang="en-US" sz="1000" dirty="0"/>
+          </a:p>
+        </p:txBody>
+      </p:sp>
+      <p:pic>
+        <p:nvPicPr>
+          <p:cNvPr id="8" name="Picture 7">
+            <a:extLst>
+              <a:ext uri="{FF2B5EF4-FFF2-40B4-BE49-F238E27FC236}">
+                <a16:creationId xmlns:a16="http://schemas.microsoft.com/office/drawing/2014/main" id="{B2A937EA-F103-A831-7AA7-57C52ADBCB80}"/>
+              </a:ext>
+            </a:extLst>
+          </p:cNvPr>
+          <p:cNvPicPr>
+            <a:picLocks noChangeAspect="1"/>
+          </p:cNvPicPr>
+          <p:nvPr/>
+        </p:nvPicPr>
+        <p:blipFill>
+          <a:blip r:embed="rId3"/>
+          <a:stretch>
+            <a:fillRect/>
+          </a:stretch>
+        </p:blipFill>
+        <p:spPr>
+          <a:xfrm>
+            <a:off x="41597" y="0"/>
+            <a:ext cx="12108805" cy="6858000"/>
+          </a:xfrm>
+          <a:prstGeom prst="rect">
+            <a:avLst/>
+          </a:prstGeom>
+        </p:spPr>
+      </p:pic>
+    </p:spTree>
+    <p:extLst>
+      <p:ext uri="{BB962C8B-B14F-4D97-AF65-F5344CB8AC3E}">
+        <p14:creationId xmlns:p14="http://schemas.microsoft.com/office/powerpoint/2010/main" val="1487992561"/>
+      </p:ext>
+    </p:extLst>
+  </p:cSld>
+  <p:clrMapOvr>
+    <a:masterClrMapping/>
+  </p:clrMapOvr>
+</p:sld>
+</file>
+
+<file path=ppt/slides/slide7.xml><?xml version="1.0" encoding="utf-8"?>
+<p:sld xmlns:a="http://schemas.openxmlformats.org/drawingml/2006/main" xmlns:r="http://schemas.openxmlformats.org/officeDocument/2006/relationships" xmlns:p="http://schemas.openxmlformats.org/presentationml/2006/main">
+  <p:cSld>
+    <p:bg>
+      <p:bgPr>
+        <a:solidFill>
+          <a:srgbClr val="FFFFFF"/>
+        </a:solidFill>
+        <a:effectLst/>
+      </p:bgPr>
+    </p:bg>
+    <p:spTree>
+      <p:nvGrpSpPr>
+        <p:cNvPr id="1" name="">
+          <a:extLst>
+            <a:ext uri="{FF2B5EF4-FFF2-40B4-BE49-F238E27FC236}">
+              <a16:creationId xmlns:a16="http://schemas.microsoft.com/office/drawing/2014/main" id="{B4F89988-6D50-0DAC-6A70-28B7A7C7F913}"/>
+            </a:ext>
+          </a:extLst>
+        </p:cNvPr>
+        <p:cNvGrpSpPr/>
+        <p:nvPr/>
+      </p:nvGrpSpPr>
+      <p:grpSpPr>
+        <a:xfrm>
+          <a:off x="0" y="0"/>
+          <a:ext cx="0" cy="0"/>
+          <a:chOff x="0" y="0"/>
+          <a:chExt cx="0" cy="0"/>
+        </a:xfrm>
+      </p:grpSpPr>
+      <p:pic>
+        <p:nvPicPr>
+          <p:cNvPr id="7" name="Picture 6">
+            <a:extLst>
+              <a:ext uri="{FF2B5EF4-FFF2-40B4-BE49-F238E27FC236}">
+                <a16:creationId xmlns:a16="http://schemas.microsoft.com/office/drawing/2014/main" id="{97C8DD47-1EBD-CEDC-ED74-DDFBE5000C0C}"/>
+              </a:ext>
+            </a:extLst>
+          </p:cNvPr>
+          <p:cNvPicPr>
+            <a:picLocks noChangeAspect="1"/>
+          </p:cNvPicPr>
+          <p:nvPr/>
+        </p:nvPicPr>
+        <p:blipFill>
+          <a:blip r:embed="rId3"/>
+          <a:stretch>
+            <a:fillRect/>
+          </a:stretch>
+        </p:blipFill>
+        <p:spPr>
+          <a:xfrm>
+            <a:off x="0" y="44735"/>
+            <a:ext cx="12192000" cy="6768529"/>
+          </a:xfrm>
+          <a:prstGeom prst="rect">
+            <a:avLst/>
+          </a:prstGeom>
+        </p:spPr>
+      </p:pic>
+    </p:spTree>
+    <p:extLst>
+      <p:ext uri="{BB962C8B-B14F-4D97-AF65-F5344CB8AC3E}">
+        <p14:creationId xmlns:p14="http://schemas.microsoft.com/office/powerpoint/2010/main" val="2244900134"/>
+      </p:ext>
+    </p:extLst>
+  </p:cSld>
+  <p:clrMapOvr>
+    <a:masterClrMapping/>
+  </p:clrMapOvr>
+</p:sld>
+</file>
+
+<file path=ppt/slides/slide8.xml><?xml version="1.0" encoding="utf-8"?>
+<p:sld xmlns:a="http://schemas.openxmlformats.org/drawingml/2006/main" xmlns:r="http://schemas.openxmlformats.org/officeDocument/2006/relationships" xmlns:p="http://schemas.openxmlformats.org/presentationml/2006/main">
   <p:cSld name="Slide 6">
     <p:bg>
       <p:bgPr>
@@ -7261,7 +9425,7 @@
 </p:sld>
 </file>
 
-<file path=ppt/slides/slide7.xml><?xml version="1.0" encoding="utf-8"?>
+<file path=ppt/slides/slide9.xml><?xml version="1.0" encoding="utf-8"?>
 <p:sld xmlns:a="http://schemas.openxmlformats.org/drawingml/2006/main" xmlns:r="http://schemas.openxmlformats.org/officeDocument/2006/relationships" xmlns:p="http://schemas.openxmlformats.org/presentationml/2006/main">
   <p:cSld name="Slide 7">
     <p:bg>
@@ -8491,1604 +10655,6 @@
       <p:sp>
         <p:nvSpPr>
           <p:cNvPr id="38" name="Text 36"/>
-          <p:cNvSpPr/>
-          <p:nvPr/>
-        </p:nvSpPr>
-        <p:spPr>
-          <a:xfrm>
-            <a:off x="548640" y="6400800"/>
-            <a:ext cx="3657600" cy="274320"/>
-          </a:xfrm>
-          <a:prstGeom prst="rect">
-            <a:avLst/>
-          </a:prstGeom>
-          <a:noFill/>
-          <a:ln/>
-        </p:spPr>
-        <p:txBody>
-          <a:bodyPr wrap="square" lIns="0" tIns="0" rIns="0" bIns="0" rtlCol="0" anchor="ctr"/>
-          <a:lstStyle/>
-          <a:p>
-            <a:pPr marL="0" indent="0">
-              <a:buNone/>
-            </a:pPr>
-            <a:r>
-              <a:rPr lang="en-US" sz="1000" dirty="0">
-                <a:solidFill>
-                  <a:srgbClr val="8A94A6"/>
-                </a:solidFill>
-                <a:latin typeface="Calibri" pitchFamily="34" charset="0"/>
-                <a:ea typeface="Calibri" pitchFamily="34" charset="-122"/>
-                <a:cs typeface="Calibri" pitchFamily="34" charset="-120"/>
-              </a:rPr>
-              <a:t>McCain · Agentic Order Status</a:t>
-            </a:r>
-            <a:endParaRPr lang="en-US" sz="1000" dirty="0"/>
-          </a:p>
-        </p:txBody>
-      </p:sp>
-    </p:spTree>
-  </p:cSld>
-  <p:clrMapOvr>
-    <a:masterClrMapping/>
-  </p:clrMapOvr>
-</p:sld>
-</file>
-
-<file path=ppt/slides/slide8.xml><?xml version="1.0" encoding="utf-8"?>
-<p:sld xmlns:a="http://schemas.openxmlformats.org/drawingml/2006/main" xmlns:r="http://schemas.openxmlformats.org/officeDocument/2006/relationships" xmlns:p="http://schemas.openxmlformats.org/presentationml/2006/main">
-  <p:cSld name="Slide 8">
-    <p:bg>
-      <p:bgPr>
-        <a:solidFill>
-          <a:srgbClr val="FFFFFF"/>
-        </a:solidFill>
-        <a:effectLst/>
-      </p:bgPr>
-    </p:bg>
-    <p:spTree>
-      <p:nvGrpSpPr>
-        <p:cNvPr id="1" name=""/>
-        <p:cNvGrpSpPr/>
-        <p:nvPr/>
-      </p:nvGrpSpPr>
-      <p:grpSpPr>
-        <a:xfrm>
-          <a:off x="0" y="0"/>
-          <a:ext cx="0" cy="0"/>
-          <a:chOff x="0" y="0"/>
-          <a:chExt cx="0" cy="0"/>
-        </a:xfrm>
-      </p:grpSpPr>
-      <p:sp>
-        <p:nvSpPr>
-          <p:cNvPr id="2" name="Text 0"/>
-          <p:cNvSpPr/>
-          <p:nvPr/>
-        </p:nvSpPr>
-        <p:spPr>
-          <a:xfrm>
-            <a:off x="548640" y="384048"/>
-            <a:ext cx="7315200" cy="274320"/>
-          </a:xfrm>
-          <a:prstGeom prst="rect">
-            <a:avLst/>
-          </a:prstGeom>
-          <a:noFill/>
-          <a:ln/>
-        </p:spPr>
-        <p:txBody>
-          <a:bodyPr wrap="square" lIns="0" tIns="0" rIns="0" bIns="0" rtlCol="0" anchor="ctr"/>
-          <a:lstStyle/>
-          <a:p>
-            <a:pPr marL="0" indent="0">
-              <a:buNone/>
-            </a:pPr>
-            <a:r>
-              <a:rPr lang="en-US" sz="1200" b="1" kern="0" spc="200" dirty="0">
-                <a:solidFill>
-                  <a:srgbClr val="FF3621"/>
-                </a:solidFill>
-                <a:latin typeface="Calibri" pitchFamily="34" charset="0"/>
-                <a:ea typeface="Calibri" pitchFamily="34" charset="-122"/>
-                <a:cs typeface="Calibri" pitchFamily="34" charset="-120"/>
-              </a:rPr>
-              <a:t>CURRENT STATUS</a:t>
-            </a:r>
-            <a:endParaRPr lang="en-US" sz="1200" dirty="0"/>
-          </a:p>
-        </p:txBody>
-      </p:sp>
-      <p:sp>
-        <p:nvSpPr>
-          <p:cNvPr id="3" name="Text 1"/>
-          <p:cNvSpPr/>
-          <p:nvPr/>
-        </p:nvSpPr>
-        <p:spPr>
-          <a:xfrm>
-            <a:off x="548640" y="658368"/>
-            <a:ext cx="10515600" cy="822960"/>
-          </a:xfrm>
-          <a:prstGeom prst="rect">
-            <a:avLst/>
-          </a:prstGeom>
-          <a:noFill/>
-          <a:ln/>
-        </p:spPr>
-        <p:txBody>
-          <a:bodyPr wrap="square" lIns="0" tIns="0" rIns="0" bIns="0" rtlCol="0" anchor="ctr"/>
-          <a:lstStyle/>
-          <a:p>
-            <a:pPr marL="0" indent="0">
-              <a:buNone/>
-            </a:pPr>
-            <a:r>
-              <a:rPr lang="en-US" sz="3000" b="1" dirty="0">
-                <a:solidFill>
-                  <a:srgbClr val="12203A"/>
-                </a:solidFill>
-                <a:latin typeface="Cambria" pitchFamily="34" charset="0"/>
-                <a:ea typeface="Cambria" pitchFamily="34" charset="-122"/>
-                <a:cs typeface="Cambria" pitchFamily="34" charset="-120"/>
-              </a:rPr>
-              <a:t>Where we are today — Day 1 of Sprint 1</a:t>
-            </a:r>
-            <a:endParaRPr lang="en-US" sz="3000" dirty="0"/>
-          </a:p>
-        </p:txBody>
-      </p:sp>
-      <p:sp>
-        <p:nvSpPr>
-          <p:cNvPr id="4" name="Shape 2"/>
-          <p:cNvSpPr/>
-          <p:nvPr/>
-        </p:nvSpPr>
-        <p:spPr>
-          <a:xfrm>
-            <a:off x="548640" y="1828800"/>
-            <a:ext cx="5212080" cy="4160520"/>
-          </a:xfrm>
-          <a:prstGeom prst="roundRect">
-            <a:avLst>
-              <a:gd name="adj" fmla="val 1758"/>
-            </a:avLst>
-          </a:prstGeom>
-          <a:solidFill>
-            <a:srgbClr val="EAF6EE"/>
-          </a:solidFill>
-          <a:ln w="12700">
-            <a:solidFill>
-              <a:srgbClr val="1F7A43"/>
-            </a:solidFill>
-            <a:prstDash val="solid"/>
-          </a:ln>
-        </p:spPr>
-      </p:sp>
-      <p:sp>
-        <p:nvSpPr>
-          <p:cNvPr id="5" name="Text 3"/>
-          <p:cNvSpPr/>
-          <p:nvPr/>
-        </p:nvSpPr>
-        <p:spPr>
-          <a:xfrm>
-            <a:off x="777240" y="1993392"/>
-            <a:ext cx="4754880" cy="320040"/>
-          </a:xfrm>
-          <a:prstGeom prst="rect">
-            <a:avLst/>
-          </a:prstGeom>
-          <a:noFill/>
-          <a:ln/>
-        </p:spPr>
-        <p:txBody>
-          <a:bodyPr wrap="square" lIns="0" tIns="0" rIns="0" bIns="0" rtlCol="0" anchor="ctr"/>
-          <a:lstStyle/>
-          <a:p>
-            <a:pPr marL="0" indent="0">
-              <a:buNone/>
-            </a:pPr>
-            <a:r>
-              <a:rPr lang="en-US" sz="1300" b="1" dirty="0">
-                <a:solidFill>
-                  <a:srgbClr val="1F7A43"/>
-                </a:solidFill>
-                <a:latin typeface="Calibri" pitchFamily="34" charset="0"/>
-                <a:ea typeface="Calibri" pitchFamily="34" charset="-122"/>
-                <a:cs typeface="Calibri" pitchFamily="34" charset="-120"/>
-              </a:rPr>
-              <a:t>DONE</a:t>
-            </a:r>
-            <a:endParaRPr lang="en-US" sz="1300" dirty="0"/>
-          </a:p>
-        </p:txBody>
-      </p:sp>
-      <p:sp>
-        <p:nvSpPr>
-          <p:cNvPr id="6" name="Shape 4"/>
-          <p:cNvSpPr/>
-          <p:nvPr/>
-        </p:nvSpPr>
-        <p:spPr>
-          <a:xfrm>
-            <a:off x="804672" y="2450592"/>
-            <a:ext cx="146304" cy="146304"/>
-          </a:xfrm>
-          <a:prstGeom prst="ellipse">
-            <a:avLst/>
-          </a:prstGeom>
-          <a:solidFill>
-            <a:srgbClr val="1F7A43"/>
-          </a:solidFill>
-          <a:ln w="19050">
-            <a:solidFill>
-              <a:srgbClr val="1F7A43"/>
-            </a:solidFill>
-            <a:prstDash val="solid"/>
-          </a:ln>
-        </p:spPr>
-      </p:sp>
-      <p:sp>
-        <p:nvSpPr>
-          <p:cNvPr id="7" name="Text 5"/>
-          <p:cNvSpPr/>
-          <p:nvPr/>
-        </p:nvSpPr>
-        <p:spPr>
-          <a:xfrm>
-            <a:off x="1078992" y="2350008"/>
-            <a:ext cx="4389120" cy="502920"/>
-          </a:xfrm>
-          <a:prstGeom prst="rect">
-            <a:avLst/>
-          </a:prstGeom>
-          <a:noFill/>
-          <a:ln/>
-        </p:spPr>
-        <p:txBody>
-          <a:bodyPr wrap="square" lIns="0" tIns="0" rIns="0" bIns="0" rtlCol="0" anchor="ctr"/>
-          <a:lstStyle/>
-          <a:p>
-            <a:pPr marL="0" indent="0">
-              <a:buNone/>
-            </a:pPr>
-            <a:r>
-              <a:rPr lang="en-US" sz="1200" dirty="0">
-                <a:solidFill>
-                  <a:srgbClr val="12203A"/>
-                </a:solidFill>
-                <a:latin typeface="Calibri" pitchFamily="34" charset="0"/>
-                <a:ea typeface="Calibri" pitchFamily="34" charset="-122"/>
-                <a:cs typeface="Calibri" pitchFamily="34" charset="-120"/>
-              </a:rPr>
-              <a:t>Requirements &amp; environment (Dev/QA/Prod) plan finalized</a:t>
-            </a:r>
-            <a:endParaRPr lang="en-US" sz="1200" dirty="0"/>
-          </a:p>
-        </p:txBody>
-      </p:sp>
-      <p:sp>
-        <p:nvSpPr>
-          <p:cNvPr id="8" name="Shape 6"/>
-          <p:cNvSpPr/>
-          <p:nvPr/>
-        </p:nvSpPr>
-        <p:spPr>
-          <a:xfrm>
-            <a:off x="804672" y="3108960"/>
-            <a:ext cx="146304" cy="146304"/>
-          </a:xfrm>
-          <a:prstGeom prst="ellipse">
-            <a:avLst/>
-          </a:prstGeom>
-          <a:solidFill>
-            <a:srgbClr val="1F7A43"/>
-          </a:solidFill>
-          <a:ln w="19050">
-            <a:solidFill>
-              <a:srgbClr val="1F7A43"/>
-            </a:solidFill>
-            <a:prstDash val="solid"/>
-          </a:ln>
-        </p:spPr>
-      </p:sp>
-      <p:sp>
-        <p:nvSpPr>
-          <p:cNvPr id="9" name="Text 7"/>
-          <p:cNvSpPr/>
-          <p:nvPr/>
-        </p:nvSpPr>
-        <p:spPr>
-          <a:xfrm>
-            <a:off x="1078992" y="3008376"/>
-            <a:ext cx="4389120" cy="502920"/>
-          </a:xfrm>
-          <a:prstGeom prst="rect">
-            <a:avLst/>
-          </a:prstGeom>
-          <a:noFill/>
-          <a:ln/>
-        </p:spPr>
-        <p:txBody>
-          <a:bodyPr wrap="square" lIns="0" tIns="0" rIns="0" bIns="0" rtlCol="0" anchor="ctr"/>
-          <a:lstStyle/>
-          <a:p>
-            <a:pPr marL="0" indent="0">
-              <a:buNone/>
-            </a:pPr>
-            <a:r>
-              <a:rPr lang="en-US" sz="1200" dirty="0">
-                <a:solidFill>
-                  <a:srgbClr val="12203A"/>
-                </a:solidFill>
-                <a:latin typeface="Calibri" pitchFamily="34" charset="0"/>
-                <a:ea typeface="Calibri" pitchFamily="34" charset="-122"/>
-                <a:cs typeface="Calibri" pitchFamily="34" charset="-120"/>
-              </a:rPr>
-              <a:t>Reference architecture defined — defense-in-depth, Databricks-native</a:t>
-            </a:r>
-            <a:endParaRPr lang="en-US" sz="1200" dirty="0"/>
-          </a:p>
-        </p:txBody>
-      </p:sp>
-      <p:sp>
-        <p:nvSpPr>
-          <p:cNvPr id="10" name="Shape 8"/>
-          <p:cNvSpPr/>
-          <p:nvPr/>
-        </p:nvSpPr>
-        <p:spPr>
-          <a:xfrm>
-            <a:off x="804672" y="3767328"/>
-            <a:ext cx="146304" cy="146304"/>
-          </a:xfrm>
-          <a:prstGeom prst="ellipse">
-            <a:avLst/>
-          </a:prstGeom>
-          <a:solidFill>
-            <a:srgbClr val="1F7A43"/>
-          </a:solidFill>
-          <a:ln w="19050">
-            <a:solidFill>
-              <a:srgbClr val="1F7A43"/>
-            </a:solidFill>
-            <a:prstDash val="solid"/>
-          </a:ln>
-        </p:spPr>
-      </p:sp>
-      <p:sp>
-        <p:nvSpPr>
-          <p:cNvPr id="11" name="Text 9"/>
-          <p:cNvSpPr/>
-          <p:nvPr/>
-        </p:nvSpPr>
-        <p:spPr>
-          <a:xfrm>
-            <a:off x="1078992" y="3666744"/>
-            <a:ext cx="4389120" cy="502920"/>
-          </a:xfrm>
-          <a:prstGeom prst="rect">
-            <a:avLst/>
-          </a:prstGeom>
-          <a:noFill/>
-          <a:ln/>
-        </p:spPr>
-        <p:txBody>
-          <a:bodyPr wrap="square" lIns="0" tIns="0" rIns="0" bIns="0" rtlCol="0" anchor="ctr"/>
-          <a:lstStyle/>
-          <a:p>
-            <a:pPr marL="0" indent="0">
-              <a:buNone/>
-            </a:pPr>
-            <a:r>
-              <a:rPr lang="en-US" sz="1200" dirty="0">
-                <a:solidFill>
-                  <a:srgbClr val="12203A"/>
-                </a:solidFill>
-                <a:latin typeface="Calibri" pitchFamily="34" charset="0"/>
-                <a:ea typeface="Calibri" pitchFamily="34" charset="-122"/>
-                <a:cs typeface="Calibri" pitchFamily="34" charset="-120"/>
-              </a:rPr>
-              <a:t>3-month, 6-sprint delivery plan finalized</a:t>
-            </a:r>
-            <a:endParaRPr lang="en-US" sz="1200" dirty="0"/>
-          </a:p>
-        </p:txBody>
-      </p:sp>
-      <p:sp>
-        <p:nvSpPr>
-          <p:cNvPr id="12" name="Shape 10"/>
-          <p:cNvSpPr/>
-          <p:nvPr/>
-        </p:nvSpPr>
-        <p:spPr>
-          <a:xfrm>
-            <a:off x="804672" y="4425696"/>
-            <a:ext cx="146304" cy="146304"/>
-          </a:xfrm>
-          <a:prstGeom prst="ellipse">
-            <a:avLst/>
-          </a:prstGeom>
-          <a:solidFill>
-            <a:srgbClr val="1F7A43"/>
-          </a:solidFill>
-          <a:ln w="19050">
-            <a:solidFill>
-              <a:srgbClr val="1F7A43"/>
-            </a:solidFill>
-            <a:prstDash val="solid"/>
-          </a:ln>
-        </p:spPr>
-      </p:sp>
-      <p:sp>
-        <p:nvSpPr>
-          <p:cNvPr id="13" name="Text 11"/>
-          <p:cNvSpPr/>
-          <p:nvPr/>
-        </p:nvSpPr>
-        <p:spPr>
-          <a:xfrm>
-            <a:off x="1078992" y="4325112"/>
-            <a:ext cx="4389120" cy="502920"/>
-          </a:xfrm>
-          <a:prstGeom prst="rect">
-            <a:avLst/>
-          </a:prstGeom>
-          <a:noFill/>
-          <a:ln/>
-        </p:spPr>
-        <p:txBody>
-          <a:bodyPr wrap="square" lIns="0" tIns="0" rIns="0" bIns="0" rtlCol="0" anchor="ctr"/>
-          <a:lstStyle/>
-          <a:p>
-            <a:pPr marL="0" indent="0">
-              <a:buNone/>
-            </a:pPr>
-            <a:r>
-              <a:rPr lang="en-US" sz="1200" dirty="0">
-                <a:solidFill>
-                  <a:srgbClr val="12203A"/>
-                </a:solidFill>
-                <a:latin typeface="Calibri" pitchFamily="34" charset="0"/>
-                <a:ea typeface="Calibri" pitchFamily="34" charset="-122"/>
-                <a:cs typeface="Calibri" pitchFamily="34" charset="-120"/>
-              </a:rPr>
-              <a:t>Sprint 1 backlog scoped in detail — 11 tasks, owners assigned</a:t>
-            </a:r>
-            <a:endParaRPr lang="en-US" sz="1200" dirty="0"/>
-          </a:p>
-        </p:txBody>
-      </p:sp>
-      <p:sp>
-        <p:nvSpPr>
-          <p:cNvPr id="14" name="Shape 12"/>
-          <p:cNvSpPr/>
-          <p:nvPr/>
-        </p:nvSpPr>
-        <p:spPr>
-          <a:xfrm>
-            <a:off x="804672" y="5084064"/>
-            <a:ext cx="146304" cy="146304"/>
-          </a:xfrm>
-          <a:prstGeom prst="ellipse">
-            <a:avLst/>
-          </a:prstGeom>
-          <a:solidFill>
-            <a:srgbClr val="1F7A43"/>
-          </a:solidFill>
-          <a:ln w="19050">
-            <a:solidFill>
-              <a:srgbClr val="1F7A43"/>
-            </a:solidFill>
-            <a:prstDash val="solid"/>
-          </a:ln>
-        </p:spPr>
-      </p:sp>
-      <p:sp>
-        <p:nvSpPr>
-          <p:cNvPr id="15" name="Text 13"/>
-          <p:cNvSpPr/>
-          <p:nvPr/>
-        </p:nvSpPr>
-        <p:spPr>
-          <a:xfrm>
-            <a:off x="1078992" y="4983480"/>
-            <a:ext cx="4389120" cy="502920"/>
-          </a:xfrm>
-          <a:prstGeom prst="rect">
-            <a:avLst/>
-          </a:prstGeom>
-          <a:noFill/>
-          <a:ln/>
-        </p:spPr>
-        <p:txBody>
-          <a:bodyPr wrap="square" lIns="0" tIns="0" rIns="0" bIns="0" rtlCol="0" anchor="ctr"/>
-          <a:lstStyle/>
-          <a:p>
-            <a:pPr marL="0" indent="0">
-              <a:buNone/>
-            </a:pPr>
-            <a:r>
-              <a:rPr lang="en-US" sz="1200" dirty="0">
-                <a:solidFill>
-                  <a:srgbClr val="12203A"/>
-                </a:solidFill>
-                <a:latin typeface="Calibri" pitchFamily="34" charset="0"/>
-                <a:ea typeface="Calibri" pitchFamily="34" charset="-122"/>
-                <a:cs typeface="Calibri" pitchFamily="34" charset="-120"/>
-              </a:rPr>
-              <a:t>22 open questions identified for McCain &amp; internal product team</a:t>
-            </a:r>
-            <a:endParaRPr lang="en-US" sz="1200" dirty="0"/>
-          </a:p>
-        </p:txBody>
-      </p:sp>
-      <p:sp>
-        <p:nvSpPr>
-          <p:cNvPr id="16" name="Shape 14"/>
-          <p:cNvSpPr/>
-          <p:nvPr/>
-        </p:nvSpPr>
-        <p:spPr>
-          <a:xfrm>
-            <a:off x="6080760" y="1828800"/>
-            <a:ext cx="5212080" cy="1965960"/>
-          </a:xfrm>
-          <a:prstGeom prst="roundRect">
-            <a:avLst>
-              <a:gd name="adj" fmla="val 3721"/>
-            </a:avLst>
-          </a:prstGeom>
-          <a:solidFill>
-            <a:srgbClr val="FDF4E3"/>
-          </a:solidFill>
-          <a:ln w="12700">
-            <a:solidFill>
-              <a:srgbClr val="C9821A"/>
-            </a:solidFill>
-            <a:prstDash val="solid"/>
-          </a:ln>
-        </p:spPr>
-      </p:sp>
-      <p:sp>
-        <p:nvSpPr>
-          <p:cNvPr id="17" name="Text 15"/>
-          <p:cNvSpPr/>
-          <p:nvPr/>
-        </p:nvSpPr>
-        <p:spPr>
-          <a:xfrm>
-            <a:off x="6309360" y="1993392"/>
-            <a:ext cx="4754880" cy="320040"/>
-          </a:xfrm>
-          <a:prstGeom prst="rect">
-            <a:avLst/>
-          </a:prstGeom>
-          <a:noFill/>
-          <a:ln/>
-        </p:spPr>
-        <p:txBody>
-          <a:bodyPr wrap="square" lIns="0" tIns="0" rIns="0" bIns="0" rtlCol="0" anchor="ctr"/>
-          <a:lstStyle/>
-          <a:p>
-            <a:pPr marL="0" indent="0">
-              <a:buNone/>
-            </a:pPr>
-            <a:r>
-              <a:rPr lang="en-US" sz="1300" b="1" dirty="0">
-                <a:solidFill>
-                  <a:srgbClr val="C9821A"/>
-                </a:solidFill>
-                <a:latin typeface="Calibri" pitchFamily="34" charset="0"/>
-                <a:ea typeface="Calibri" pitchFamily="34" charset="-122"/>
-                <a:cs typeface="Calibri" pitchFamily="34" charset="-120"/>
-              </a:rPr>
-              <a:t>IN PROGRESS — SPRINT 1</a:t>
-            </a:r>
-            <a:endParaRPr lang="en-US" sz="1300" dirty="0"/>
-          </a:p>
-        </p:txBody>
-      </p:sp>
-      <p:sp>
-        <p:nvSpPr>
-          <p:cNvPr id="18" name="Text 16"/>
-          <p:cNvSpPr/>
-          <p:nvPr/>
-        </p:nvSpPr>
-        <p:spPr>
-          <a:xfrm>
-            <a:off x="6309360" y="2331720"/>
-            <a:ext cx="4754880" cy="320040"/>
-          </a:xfrm>
-          <a:prstGeom prst="rect">
-            <a:avLst/>
-          </a:prstGeom>
-          <a:noFill/>
-          <a:ln/>
-        </p:spPr>
-        <p:txBody>
-          <a:bodyPr wrap="square" lIns="0" tIns="0" rIns="0" bIns="0" rtlCol="0" anchor="ctr"/>
-          <a:lstStyle/>
-          <a:p>
-            <a:pPr marL="0" indent="0">
-              <a:buNone/>
-            </a:pPr>
-            <a:r>
-              <a:rPr lang="en-US" sz="1500" b="1" dirty="0">
-                <a:solidFill>
-                  <a:srgbClr val="12203A"/>
-                </a:solidFill>
-                <a:latin typeface="Cambria" pitchFamily="34" charset="0"/>
-                <a:ea typeface="Cambria" pitchFamily="34" charset="-122"/>
-                <a:cs typeface="Cambria" pitchFamily="34" charset="-120"/>
-              </a:rPr>
-              <a:t>Order Status flagship build</a:t>
-            </a:r>
-            <a:endParaRPr lang="en-US" sz="1500" dirty="0"/>
-          </a:p>
-        </p:txBody>
-      </p:sp>
-      <p:sp>
-        <p:nvSpPr>
-          <p:cNvPr id="19" name="Text 17"/>
-          <p:cNvSpPr/>
-          <p:nvPr/>
-        </p:nvSpPr>
-        <p:spPr>
-          <a:xfrm>
-            <a:off x="6309360" y="2697480"/>
-            <a:ext cx="4754880" cy="640080"/>
-          </a:xfrm>
-          <a:prstGeom prst="rect">
-            <a:avLst/>
-          </a:prstGeom>
-          <a:noFill/>
-          <a:ln/>
-        </p:spPr>
-        <p:txBody>
-          <a:bodyPr wrap="square" lIns="0" tIns="0" rIns="0" bIns="0" rtlCol="0" anchor="ctr"/>
-          <a:lstStyle/>
-          <a:p>
-            <a:pPr marL="0" indent="0">
-              <a:buNone/>
-            </a:pPr>
-            <a:r>
-              <a:rPr lang="en-US" sz="1100" dirty="0">
-                <a:solidFill>
-                  <a:srgbClr val="12203A"/>
-                </a:solidFill>
-                <a:latin typeface="Calibri" pitchFamily="34" charset="0"/>
-                <a:ea typeface="Calibri" pitchFamily="34" charset="-122"/>
-                <a:cs typeface="Calibri" pitchFamily="34" charset="-120"/>
-              </a:rPr>
-              <a:t>RBAC &amp; Unity Catalog scope · DB Shield · all 8 order states · disambiguation &amp; follow-ups · guardrails · tracing &amp; evaluation gate · UI prototype</a:t>
-            </a:r>
-            <a:endParaRPr lang="en-US" sz="1100" dirty="0"/>
-          </a:p>
-        </p:txBody>
-      </p:sp>
-      <p:sp>
-        <p:nvSpPr>
-          <p:cNvPr id="20" name="Text 18"/>
-          <p:cNvSpPr/>
-          <p:nvPr/>
-        </p:nvSpPr>
-        <p:spPr>
-          <a:xfrm>
-            <a:off x="6309360" y="3337560"/>
-            <a:ext cx="4754880" cy="365760"/>
-          </a:xfrm>
-          <a:prstGeom prst="rect">
-            <a:avLst/>
-          </a:prstGeom>
-          <a:noFill/>
-          <a:ln/>
-        </p:spPr>
-        <p:txBody>
-          <a:bodyPr wrap="square" lIns="0" tIns="0" rIns="0" bIns="0" rtlCol="0" anchor="ctr"/>
-          <a:lstStyle/>
-          <a:p>
-            <a:pPr marL="0" indent="0">
-              <a:buNone/>
-            </a:pPr>
-            <a:r>
-              <a:rPr lang="en-US" sz="1050" i="1" dirty="0">
-                <a:solidFill>
-                  <a:srgbClr val="5B6472"/>
-                </a:solidFill>
-                <a:latin typeface="Calibri" pitchFamily="34" charset="0"/>
-                <a:ea typeface="Calibri" pitchFamily="34" charset="-122"/>
-                <a:cs typeface="Calibri" pitchFamily="34" charset="-120"/>
-              </a:rPr>
-              <a:t>Target: working demo + evaluation gate passed by 11 Aug</a:t>
-            </a:r>
-            <a:endParaRPr lang="en-US" sz="1050" dirty="0"/>
-          </a:p>
-        </p:txBody>
-      </p:sp>
-      <p:sp>
-        <p:nvSpPr>
-          <p:cNvPr id="21" name="Shape 19"/>
-          <p:cNvSpPr/>
-          <p:nvPr/>
-        </p:nvSpPr>
-        <p:spPr>
-          <a:xfrm>
-            <a:off x="6080760" y="3977640"/>
-            <a:ext cx="5212080" cy="2011680"/>
-          </a:xfrm>
-          <a:prstGeom prst="roundRect">
-            <a:avLst>
-              <a:gd name="adj" fmla="val 3636"/>
-            </a:avLst>
-          </a:prstGeom>
-          <a:solidFill>
-            <a:srgbClr val="F4F6FA"/>
-          </a:solidFill>
-          <a:ln w="12700">
-            <a:solidFill>
-              <a:srgbClr val="E1E5EE"/>
-            </a:solidFill>
-            <a:prstDash val="solid"/>
-          </a:ln>
-        </p:spPr>
-      </p:sp>
-      <p:sp>
-        <p:nvSpPr>
-          <p:cNvPr id="22" name="Text 20"/>
-          <p:cNvSpPr/>
-          <p:nvPr/>
-        </p:nvSpPr>
-        <p:spPr>
-          <a:xfrm>
-            <a:off x="6309360" y="4142232"/>
-            <a:ext cx="4754880" cy="320040"/>
-          </a:xfrm>
-          <a:prstGeom prst="rect">
-            <a:avLst/>
-          </a:prstGeom>
-          <a:noFill/>
-          <a:ln/>
-        </p:spPr>
-        <p:txBody>
-          <a:bodyPr wrap="square" lIns="0" tIns="0" rIns="0" bIns="0" rtlCol="0" anchor="ctr"/>
-          <a:lstStyle/>
-          <a:p>
-            <a:pPr marL="0" indent="0">
-              <a:buNone/>
-            </a:pPr>
-            <a:r>
-              <a:rPr lang="en-US" sz="1300" b="1" dirty="0">
-                <a:solidFill>
-                  <a:srgbClr val="5B6472"/>
-                </a:solidFill>
-                <a:latin typeface="Calibri" pitchFamily="34" charset="0"/>
-                <a:ea typeface="Calibri" pitchFamily="34" charset="-122"/>
-                <a:cs typeface="Calibri" pitchFamily="34" charset="-120"/>
-              </a:rPr>
-              <a:t>UPCOMING</a:t>
-            </a:r>
-            <a:endParaRPr lang="en-US" sz="1300" dirty="0"/>
-          </a:p>
-        </p:txBody>
-      </p:sp>
-      <p:sp>
-        <p:nvSpPr>
-          <p:cNvPr id="23" name="Shape 21"/>
-          <p:cNvSpPr/>
-          <p:nvPr/>
-        </p:nvSpPr>
-        <p:spPr>
-          <a:xfrm>
-            <a:off x="6336792" y="4581144"/>
-            <a:ext cx="146304" cy="146304"/>
-          </a:xfrm>
-          <a:prstGeom prst="ellipse">
-            <a:avLst/>
-          </a:prstGeom>
-          <a:solidFill>
-            <a:srgbClr val="FFFFFF"/>
-          </a:solidFill>
-          <a:ln w="19050">
-            <a:solidFill>
-              <a:srgbClr val="8A94A6"/>
-            </a:solidFill>
-            <a:prstDash val="solid"/>
-          </a:ln>
-        </p:spPr>
-      </p:sp>
-      <p:sp>
-        <p:nvSpPr>
-          <p:cNvPr id="24" name="Text 22"/>
-          <p:cNvSpPr/>
-          <p:nvPr/>
-        </p:nvSpPr>
-        <p:spPr>
-          <a:xfrm>
-            <a:off x="6611112" y="4480560"/>
-            <a:ext cx="4389120" cy="502920"/>
-          </a:xfrm>
-          <a:prstGeom prst="rect">
-            <a:avLst/>
-          </a:prstGeom>
-          <a:noFill/>
-          <a:ln/>
-        </p:spPr>
-        <p:txBody>
-          <a:bodyPr wrap="square" lIns="0" tIns="0" rIns="0" bIns="0" rtlCol="0" anchor="ctr"/>
-          <a:lstStyle/>
-          <a:p>
-            <a:pPr marL="0" indent="0">
-              <a:buNone/>
-            </a:pPr>
-            <a:r>
-              <a:rPr lang="en-US" sz="1200" dirty="0">
-                <a:solidFill>
-                  <a:srgbClr val="12203A"/>
-                </a:solidFill>
-                <a:latin typeface="Calibri" pitchFamily="34" charset="0"/>
-                <a:ea typeface="Calibri" pitchFamily="34" charset="-122"/>
-                <a:cs typeface="Calibri" pitchFamily="34" charset="-120"/>
-              </a:rPr>
-              <a:t>Scale/region decisions from McCain — gate Prod sizing</a:t>
-            </a:r>
-            <a:endParaRPr lang="en-US" sz="1200" dirty="0"/>
-          </a:p>
-        </p:txBody>
-      </p:sp>
-      <p:sp>
-        <p:nvSpPr>
-          <p:cNvPr id="25" name="Shape 23"/>
-          <p:cNvSpPr/>
-          <p:nvPr/>
-        </p:nvSpPr>
-        <p:spPr>
-          <a:xfrm>
-            <a:off x="6336792" y="5184648"/>
-            <a:ext cx="146304" cy="146304"/>
-          </a:xfrm>
-          <a:prstGeom prst="ellipse">
-            <a:avLst/>
-          </a:prstGeom>
-          <a:solidFill>
-            <a:srgbClr val="FFFFFF"/>
-          </a:solidFill>
-          <a:ln w="19050">
-            <a:solidFill>
-              <a:srgbClr val="8A94A6"/>
-            </a:solidFill>
-            <a:prstDash val="solid"/>
-          </a:ln>
-        </p:spPr>
-      </p:sp>
-      <p:sp>
-        <p:nvSpPr>
-          <p:cNvPr id="26" name="Text 24"/>
-          <p:cNvSpPr/>
-          <p:nvPr/>
-        </p:nvSpPr>
-        <p:spPr>
-          <a:xfrm>
-            <a:off x="6611112" y="5084064"/>
-            <a:ext cx="4389120" cy="502920"/>
-          </a:xfrm>
-          <a:prstGeom prst="rect">
-            <a:avLst/>
-          </a:prstGeom>
-          <a:noFill/>
-          <a:ln/>
-        </p:spPr>
-        <p:txBody>
-          <a:bodyPr wrap="square" lIns="0" tIns="0" rIns="0" bIns="0" rtlCol="0" anchor="ctr"/>
-          <a:lstStyle/>
-          <a:p>
-            <a:pPr marL="0" indent="0">
-              <a:buNone/>
-            </a:pPr>
-            <a:r>
-              <a:rPr lang="en-US" sz="1200" dirty="0">
-                <a:solidFill>
-                  <a:srgbClr val="12203A"/>
-                </a:solidFill>
-                <a:latin typeface="Calibri" pitchFamily="34" charset="0"/>
-                <a:ea typeface="Calibri" pitchFamily="34" charset="-122"/>
-                <a:cs typeface="Calibri" pitchFamily="34" charset="-120"/>
-              </a:rPr>
-              <a:t>QA environment stand-up — owned by McCain's platform team</a:t>
-            </a:r>
-            <a:endParaRPr lang="en-US" sz="1200" dirty="0"/>
-          </a:p>
-        </p:txBody>
-      </p:sp>
-      <p:sp>
-        <p:nvSpPr>
-          <p:cNvPr id="27" name="Text 25"/>
-          <p:cNvSpPr/>
-          <p:nvPr/>
-        </p:nvSpPr>
-        <p:spPr>
-          <a:xfrm>
-            <a:off x="11505895" y="6400800"/>
-            <a:ext cx="457200" cy="274320"/>
-          </a:xfrm>
-          <a:prstGeom prst="rect">
-            <a:avLst/>
-          </a:prstGeom>
-          <a:noFill/>
-          <a:ln/>
-        </p:spPr>
-        <p:txBody>
-          <a:bodyPr wrap="square" lIns="0" tIns="0" rIns="0" bIns="0" rtlCol="0" anchor="ctr"/>
-          <a:lstStyle/>
-          <a:p>
-            <a:pPr marL="0" indent="0" algn="r">
-              <a:buNone/>
-            </a:pPr>
-            <a:r>
-              <a:rPr lang="en-US" sz="1000" dirty="0">
-                <a:solidFill>
-                  <a:srgbClr val="8A94A6"/>
-                </a:solidFill>
-                <a:latin typeface="Calibri" pitchFamily="34" charset="0"/>
-                <a:ea typeface="Calibri" pitchFamily="34" charset="-122"/>
-                <a:cs typeface="Calibri" pitchFamily="34" charset="-120"/>
-              </a:rPr>
-              <a:t>8</a:t>
-            </a:r>
-            <a:endParaRPr lang="en-US" sz="1000" dirty="0"/>
-          </a:p>
-        </p:txBody>
-      </p:sp>
-      <p:sp>
-        <p:nvSpPr>
-          <p:cNvPr id="28" name="Text 26"/>
-          <p:cNvSpPr/>
-          <p:nvPr/>
-        </p:nvSpPr>
-        <p:spPr>
-          <a:xfrm>
-            <a:off x="548640" y="6400800"/>
-            <a:ext cx="3657600" cy="274320"/>
-          </a:xfrm>
-          <a:prstGeom prst="rect">
-            <a:avLst/>
-          </a:prstGeom>
-          <a:noFill/>
-          <a:ln/>
-        </p:spPr>
-        <p:txBody>
-          <a:bodyPr wrap="square" lIns="0" tIns="0" rIns="0" bIns="0" rtlCol="0" anchor="ctr"/>
-          <a:lstStyle/>
-          <a:p>
-            <a:pPr marL="0" indent="0">
-              <a:buNone/>
-            </a:pPr>
-            <a:r>
-              <a:rPr lang="en-US" sz="1000" dirty="0">
-                <a:solidFill>
-                  <a:srgbClr val="8A94A6"/>
-                </a:solidFill>
-                <a:latin typeface="Calibri" pitchFamily="34" charset="0"/>
-                <a:ea typeface="Calibri" pitchFamily="34" charset="-122"/>
-                <a:cs typeface="Calibri" pitchFamily="34" charset="-120"/>
-              </a:rPr>
-              <a:t>McCain · Agentic Order Status</a:t>
-            </a:r>
-            <a:endParaRPr lang="en-US" sz="1000" dirty="0"/>
-          </a:p>
-        </p:txBody>
-      </p:sp>
-    </p:spTree>
-  </p:cSld>
-  <p:clrMapOvr>
-    <a:masterClrMapping/>
-  </p:clrMapOvr>
-</p:sld>
-</file>
-
-<file path=ppt/slides/slide9.xml><?xml version="1.0" encoding="utf-8"?>
-<p:sld xmlns:a="http://schemas.openxmlformats.org/drawingml/2006/main" xmlns:r="http://schemas.openxmlformats.org/officeDocument/2006/relationships" xmlns:p="http://schemas.openxmlformats.org/presentationml/2006/main">
-  <p:cSld name="Slide 9">
-    <p:bg>
-      <p:bgPr>
-        <a:solidFill>
-          <a:srgbClr val="FFFFFF"/>
-        </a:solidFill>
-        <a:effectLst/>
-      </p:bgPr>
-    </p:bg>
-    <p:spTree>
-      <p:nvGrpSpPr>
-        <p:cNvPr id="1" name=""/>
-        <p:cNvGrpSpPr/>
-        <p:nvPr/>
-      </p:nvGrpSpPr>
-      <p:grpSpPr>
-        <a:xfrm>
-          <a:off x="0" y="0"/>
-          <a:ext cx="0" cy="0"/>
-          <a:chOff x="0" y="0"/>
-          <a:chExt cx="0" cy="0"/>
-        </a:xfrm>
-      </p:grpSpPr>
-      <p:sp>
-        <p:nvSpPr>
-          <p:cNvPr id="2" name="Text 0"/>
-          <p:cNvSpPr/>
-          <p:nvPr/>
-        </p:nvSpPr>
-        <p:spPr>
-          <a:xfrm>
-            <a:off x="548640" y="384048"/>
-            <a:ext cx="7315200" cy="274320"/>
-          </a:xfrm>
-          <a:prstGeom prst="rect">
-            <a:avLst/>
-          </a:prstGeom>
-          <a:noFill/>
-          <a:ln/>
-        </p:spPr>
-        <p:txBody>
-          <a:bodyPr wrap="square" lIns="0" tIns="0" rIns="0" bIns="0" rtlCol="0" anchor="ctr"/>
-          <a:lstStyle/>
-          <a:p>
-            <a:pPr marL="0" indent="0">
-              <a:buNone/>
-            </a:pPr>
-            <a:r>
-              <a:rPr lang="en-US" sz="1200" b="1" kern="0" spc="200" dirty="0">
-                <a:solidFill>
-                  <a:srgbClr val="FF3621"/>
-                </a:solidFill>
-                <a:latin typeface="Calibri" pitchFamily="34" charset="0"/>
-                <a:ea typeface="Calibri" pitchFamily="34" charset="-122"/>
-                <a:cs typeface="Calibri" pitchFamily="34" charset="-120"/>
-              </a:rPr>
-              <a:t>NEXT STEPS</a:t>
-            </a:r>
-            <a:endParaRPr lang="en-US" sz="1200" dirty="0"/>
-          </a:p>
-        </p:txBody>
-      </p:sp>
-      <p:sp>
-        <p:nvSpPr>
-          <p:cNvPr id="3" name="Text 1"/>
-          <p:cNvSpPr/>
-          <p:nvPr/>
-        </p:nvSpPr>
-        <p:spPr>
-          <a:xfrm>
-            <a:off x="548640" y="658368"/>
-            <a:ext cx="10515600" cy="822960"/>
-          </a:xfrm>
-          <a:prstGeom prst="rect">
-            <a:avLst/>
-          </a:prstGeom>
-          <a:noFill/>
-          <a:ln/>
-        </p:spPr>
-        <p:txBody>
-          <a:bodyPr wrap="square" lIns="0" tIns="0" rIns="0" bIns="0" rtlCol="0" anchor="ctr"/>
-          <a:lstStyle/>
-          <a:p>
-            <a:pPr marL="0" indent="0">
-              <a:buNone/>
-            </a:pPr>
-            <a:r>
-              <a:rPr lang="en-US" sz="3000" b="1" dirty="0">
-                <a:solidFill>
-                  <a:srgbClr val="12203A"/>
-                </a:solidFill>
-                <a:latin typeface="Cambria" pitchFamily="34" charset="0"/>
-                <a:ea typeface="Cambria" pitchFamily="34" charset="-122"/>
-                <a:cs typeface="Cambria" pitchFamily="34" charset="-120"/>
-              </a:rPr>
-              <a:t>What happens next</a:t>
-            </a:r>
-            <a:endParaRPr lang="en-US" sz="3000" dirty="0"/>
-          </a:p>
-        </p:txBody>
-      </p:sp>
-      <p:sp>
-        <p:nvSpPr>
-          <p:cNvPr id="4" name="Shape 2"/>
-          <p:cNvSpPr/>
-          <p:nvPr/>
-        </p:nvSpPr>
-        <p:spPr>
-          <a:xfrm>
-            <a:off x="640080" y="1920240"/>
-            <a:ext cx="502920" cy="502920"/>
-          </a:xfrm>
-          <a:prstGeom prst="ellipse">
-            <a:avLst/>
-          </a:prstGeom>
-          <a:solidFill>
-            <a:srgbClr val="FF3621"/>
-          </a:solidFill>
-          <a:ln/>
-        </p:spPr>
-      </p:sp>
-      <p:sp>
-        <p:nvSpPr>
-          <p:cNvPr id="5" name="Text 3"/>
-          <p:cNvSpPr/>
-          <p:nvPr/>
-        </p:nvSpPr>
-        <p:spPr>
-          <a:xfrm>
-            <a:off x="640080" y="1920240"/>
-            <a:ext cx="502920" cy="502920"/>
-          </a:xfrm>
-          <a:prstGeom prst="rect">
-            <a:avLst/>
-          </a:prstGeom>
-          <a:noFill/>
-          <a:ln/>
-        </p:spPr>
-        <p:txBody>
-          <a:bodyPr wrap="square" lIns="0" tIns="0" rIns="0" bIns="0" rtlCol="0" anchor="ctr"/>
-          <a:lstStyle/>
-          <a:p>
-            <a:pPr marL="0" indent="0" algn="ctr">
-              <a:buNone/>
-            </a:pPr>
-            <a:r>
-              <a:rPr lang="en-US" sz="1500" b="1" dirty="0">
-                <a:solidFill>
-                  <a:srgbClr val="FFFFFF"/>
-                </a:solidFill>
-                <a:latin typeface="Cambria" pitchFamily="34" charset="0"/>
-                <a:ea typeface="Cambria" pitchFamily="34" charset="-122"/>
-                <a:cs typeface="Cambria" pitchFamily="34" charset="-120"/>
-              </a:rPr>
-              <a:t>1</a:t>
-            </a:r>
-            <a:endParaRPr lang="en-US" sz="1500" dirty="0"/>
-          </a:p>
-        </p:txBody>
-      </p:sp>
-      <p:sp>
-        <p:nvSpPr>
-          <p:cNvPr id="6" name="Text 4"/>
-          <p:cNvSpPr/>
-          <p:nvPr/>
-        </p:nvSpPr>
-        <p:spPr>
-          <a:xfrm>
-            <a:off x="1417320" y="1874520"/>
-            <a:ext cx="2834640" cy="548640"/>
-          </a:xfrm>
-          <a:prstGeom prst="rect">
-            <a:avLst/>
-          </a:prstGeom>
-          <a:noFill/>
-          <a:ln/>
-        </p:spPr>
-        <p:txBody>
-          <a:bodyPr wrap="square" lIns="0" tIns="0" rIns="0" bIns="0" rtlCol="0" anchor="ctr"/>
-          <a:lstStyle/>
-          <a:p>
-            <a:pPr marL="0" indent="0">
-              <a:buNone/>
-            </a:pPr>
-            <a:r>
-              <a:rPr lang="en-US" sz="1600" b="1" dirty="0">
-                <a:solidFill>
-                  <a:srgbClr val="12203A"/>
-                </a:solidFill>
-                <a:latin typeface="Cambria" pitchFamily="34" charset="0"/>
-                <a:ea typeface="Cambria" pitchFamily="34" charset="-122"/>
-                <a:cs typeface="Cambria" pitchFamily="34" charset="-120"/>
-              </a:rPr>
-              <a:t>Finish Sprint 1</a:t>
-            </a:r>
-            <a:endParaRPr lang="en-US" sz="1600" dirty="0"/>
-          </a:p>
-        </p:txBody>
-      </p:sp>
-      <p:sp>
-        <p:nvSpPr>
-          <p:cNvPr id="7" name="Text 5"/>
-          <p:cNvSpPr/>
-          <p:nvPr/>
-        </p:nvSpPr>
-        <p:spPr>
-          <a:xfrm>
-            <a:off x="4434840" y="1874520"/>
-            <a:ext cx="6949440" cy="640080"/>
-          </a:xfrm>
-          <a:prstGeom prst="rect">
-            <a:avLst/>
-          </a:prstGeom>
-          <a:noFill/>
-          <a:ln/>
-        </p:spPr>
-        <p:txBody>
-          <a:bodyPr wrap="square" lIns="0" tIns="0" rIns="0" bIns="0" rtlCol="0" anchor="ctr"/>
-          <a:lstStyle/>
-          <a:p>
-            <a:pPr marL="0" indent="0">
-              <a:buNone/>
-            </a:pPr>
-            <a:r>
-              <a:rPr lang="en-US" sz="1300" dirty="0">
-                <a:solidFill>
-                  <a:srgbClr val="5B6472"/>
-                </a:solidFill>
-                <a:latin typeface="Calibri" pitchFamily="34" charset="0"/>
-                <a:ea typeface="Calibri" pitchFamily="34" charset="-122"/>
-                <a:cs typeface="Calibri" pitchFamily="34" charset="-120"/>
-              </a:rPr>
-              <a:t>Complete the Order Status flagship build and pass the 44-test evaluation gate by 11 Aug.</a:t>
-            </a:r>
-            <a:endParaRPr lang="en-US" sz="1300" dirty="0"/>
-          </a:p>
-        </p:txBody>
-      </p:sp>
-      <p:sp>
-        <p:nvSpPr>
-          <p:cNvPr id="8" name="Shape 6"/>
-          <p:cNvSpPr/>
-          <p:nvPr/>
-        </p:nvSpPr>
-        <p:spPr>
-          <a:xfrm>
-            <a:off x="891540" y="2423160"/>
-            <a:ext cx="0" cy="548640"/>
-          </a:xfrm>
-          <a:prstGeom prst="line">
-            <a:avLst/>
-          </a:prstGeom>
-          <a:noFill/>
-          <a:ln w="19050">
-            <a:solidFill>
-              <a:srgbClr val="E1E5EE"/>
-            </a:solidFill>
-            <a:prstDash val="solid"/>
-          </a:ln>
-        </p:spPr>
-      </p:sp>
-      <p:sp>
-        <p:nvSpPr>
-          <p:cNvPr id="9" name="Shape 7"/>
-          <p:cNvSpPr/>
-          <p:nvPr/>
-        </p:nvSpPr>
-        <p:spPr>
-          <a:xfrm>
-            <a:off x="640080" y="2971800"/>
-            <a:ext cx="502920" cy="502920"/>
-          </a:xfrm>
-          <a:prstGeom prst="ellipse">
-            <a:avLst/>
-          </a:prstGeom>
-          <a:solidFill>
-            <a:srgbClr val="FF3621"/>
-          </a:solidFill>
-          <a:ln/>
-        </p:spPr>
-      </p:sp>
-      <p:sp>
-        <p:nvSpPr>
-          <p:cNvPr id="10" name="Text 8"/>
-          <p:cNvSpPr/>
-          <p:nvPr/>
-        </p:nvSpPr>
-        <p:spPr>
-          <a:xfrm>
-            <a:off x="640080" y="2971800"/>
-            <a:ext cx="502920" cy="502920"/>
-          </a:xfrm>
-          <a:prstGeom prst="rect">
-            <a:avLst/>
-          </a:prstGeom>
-          <a:noFill/>
-          <a:ln/>
-        </p:spPr>
-        <p:txBody>
-          <a:bodyPr wrap="square" lIns="0" tIns="0" rIns="0" bIns="0" rtlCol="0" anchor="ctr"/>
-          <a:lstStyle/>
-          <a:p>
-            <a:pPr marL="0" indent="0" algn="ctr">
-              <a:buNone/>
-            </a:pPr>
-            <a:r>
-              <a:rPr lang="en-US" sz="1500" b="1" dirty="0">
-                <a:solidFill>
-                  <a:srgbClr val="FFFFFF"/>
-                </a:solidFill>
-                <a:latin typeface="Cambria" pitchFamily="34" charset="0"/>
-                <a:ea typeface="Cambria" pitchFamily="34" charset="-122"/>
-                <a:cs typeface="Cambria" pitchFamily="34" charset="-120"/>
-              </a:rPr>
-              <a:t>2</a:t>
-            </a:r>
-            <a:endParaRPr lang="en-US" sz="1500" dirty="0"/>
-          </a:p>
-        </p:txBody>
-      </p:sp>
-      <p:sp>
-        <p:nvSpPr>
-          <p:cNvPr id="11" name="Text 9"/>
-          <p:cNvSpPr/>
-          <p:nvPr/>
-        </p:nvSpPr>
-        <p:spPr>
-          <a:xfrm>
-            <a:off x="1417320" y="2926080"/>
-            <a:ext cx="2834640" cy="548640"/>
-          </a:xfrm>
-          <a:prstGeom prst="rect">
-            <a:avLst/>
-          </a:prstGeom>
-          <a:noFill/>
-          <a:ln/>
-        </p:spPr>
-        <p:txBody>
-          <a:bodyPr wrap="square" lIns="0" tIns="0" rIns="0" bIns="0" rtlCol="0" anchor="ctr"/>
-          <a:lstStyle/>
-          <a:p>
-            <a:pPr marL="0" indent="0">
-              <a:buNone/>
-            </a:pPr>
-            <a:r>
-              <a:rPr lang="en-US" sz="1600" b="1" dirty="0">
-                <a:solidFill>
-                  <a:srgbClr val="12203A"/>
-                </a:solidFill>
-                <a:latin typeface="Cambria" pitchFamily="34" charset="0"/>
-                <a:ea typeface="Cambria" pitchFamily="34" charset="-122"/>
-                <a:cs typeface="Cambria" pitchFamily="34" charset="-120"/>
-              </a:rPr>
-              <a:t>Internal demo</a:t>
-            </a:r>
-            <a:endParaRPr lang="en-US" sz="1600" dirty="0"/>
-          </a:p>
-        </p:txBody>
-      </p:sp>
-      <p:sp>
-        <p:nvSpPr>
-          <p:cNvPr id="12" name="Text 10"/>
-          <p:cNvSpPr/>
-          <p:nvPr/>
-        </p:nvSpPr>
-        <p:spPr>
-          <a:xfrm>
-            <a:off x="4434840" y="2926080"/>
-            <a:ext cx="6949440" cy="640080"/>
-          </a:xfrm>
-          <a:prstGeom prst="rect">
-            <a:avLst/>
-          </a:prstGeom>
-          <a:noFill/>
-          <a:ln/>
-        </p:spPr>
-        <p:txBody>
-          <a:bodyPr wrap="square" lIns="0" tIns="0" rIns="0" bIns="0" rtlCol="0" anchor="ctr"/>
-          <a:lstStyle/>
-          <a:p>
-            <a:pPr marL="0" indent="0">
-              <a:buNone/>
-            </a:pPr>
-            <a:r>
-              <a:rPr lang="en-US" sz="1300" dirty="0">
-                <a:solidFill>
-                  <a:srgbClr val="5B6472"/>
-                </a:solidFill>
-                <a:latin typeface="Calibri" pitchFamily="34" charset="0"/>
-                <a:ea typeface="Calibri" pitchFamily="34" charset="-122"/>
-                <a:cs typeface="Calibri" pitchFamily="34" charset="-120"/>
-              </a:rPr>
-              <a:t>Walk through the working Order Status assistant — all 8 order states, guardrails and citations.</a:t>
-            </a:r>
-            <a:endParaRPr lang="en-US" sz="1300" dirty="0"/>
-          </a:p>
-        </p:txBody>
-      </p:sp>
-      <p:sp>
-        <p:nvSpPr>
-          <p:cNvPr id="13" name="Shape 11"/>
-          <p:cNvSpPr/>
-          <p:nvPr/>
-        </p:nvSpPr>
-        <p:spPr>
-          <a:xfrm>
-            <a:off x="891540" y="3474720"/>
-            <a:ext cx="0" cy="548640"/>
-          </a:xfrm>
-          <a:prstGeom prst="line">
-            <a:avLst/>
-          </a:prstGeom>
-          <a:noFill/>
-          <a:ln w="19050">
-            <a:solidFill>
-              <a:srgbClr val="E1E5EE"/>
-            </a:solidFill>
-            <a:prstDash val="solid"/>
-          </a:ln>
-        </p:spPr>
-      </p:sp>
-      <p:sp>
-        <p:nvSpPr>
-          <p:cNvPr id="14" name="Shape 12"/>
-          <p:cNvSpPr/>
-          <p:nvPr/>
-        </p:nvSpPr>
-        <p:spPr>
-          <a:xfrm>
-            <a:off x="640080" y="4023360"/>
-            <a:ext cx="502920" cy="502920"/>
-          </a:xfrm>
-          <a:prstGeom prst="ellipse">
-            <a:avLst/>
-          </a:prstGeom>
-          <a:solidFill>
-            <a:srgbClr val="FF3621"/>
-          </a:solidFill>
-          <a:ln/>
-        </p:spPr>
-      </p:sp>
-      <p:sp>
-        <p:nvSpPr>
-          <p:cNvPr id="15" name="Text 13"/>
-          <p:cNvSpPr/>
-          <p:nvPr/>
-        </p:nvSpPr>
-        <p:spPr>
-          <a:xfrm>
-            <a:off x="640080" y="4023360"/>
-            <a:ext cx="502920" cy="502920"/>
-          </a:xfrm>
-          <a:prstGeom prst="rect">
-            <a:avLst/>
-          </a:prstGeom>
-          <a:noFill/>
-          <a:ln/>
-        </p:spPr>
-        <p:txBody>
-          <a:bodyPr wrap="square" lIns="0" tIns="0" rIns="0" bIns="0" rtlCol="0" anchor="ctr"/>
-          <a:lstStyle/>
-          <a:p>
-            <a:pPr marL="0" indent="0" algn="ctr">
-              <a:buNone/>
-            </a:pPr>
-            <a:r>
-              <a:rPr lang="en-US" sz="1500" b="1" dirty="0">
-                <a:solidFill>
-                  <a:srgbClr val="FFFFFF"/>
-                </a:solidFill>
-                <a:latin typeface="Cambria" pitchFamily="34" charset="0"/>
-                <a:ea typeface="Cambria" pitchFamily="34" charset="-122"/>
-                <a:cs typeface="Cambria" pitchFamily="34" charset="-120"/>
-              </a:rPr>
-              <a:t>3</a:t>
-            </a:r>
-            <a:endParaRPr lang="en-US" sz="1500" dirty="0"/>
-          </a:p>
-        </p:txBody>
-      </p:sp>
-      <p:sp>
-        <p:nvSpPr>
-          <p:cNvPr id="16" name="Text 14"/>
-          <p:cNvSpPr/>
-          <p:nvPr/>
-        </p:nvSpPr>
-        <p:spPr>
-          <a:xfrm>
-            <a:off x="1417320" y="3977640"/>
-            <a:ext cx="2834640" cy="548640"/>
-          </a:xfrm>
-          <a:prstGeom prst="rect">
-            <a:avLst/>
-          </a:prstGeom>
-          <a:noFill/>
-          <a:ln/>
-        </p:spPr>
-        <p:txBody>
-          <a:bodyPr wrap="square" lIns="0" tIns="0" rIns="0" bIns="0" rtlCol="0" anchor="ctr"/>
-          <a:lstStyle/>
-          <a:p>
-            <a:pPr marL="0" indent="0">
-              <a:buNone/>
-            </a:pPr>
-            <a:r>
-              <a:rPr lang="en-US" sz="1600" b="1" dirty="0">
-                <a:solidFill>
-                  <a:srgbClr val="12203A"/>
-                </a:solidFill>
-                <a:latin typeface="Cambria" pitchFamily="34" charset="0"/>
-                <a:ea typeface="Cambria" pitchFamily="34" charset="-122"/>
-                <a:cs typeface="Cambria" pitchFamily="34" charset="-120"/>
-              </a:rPr>
-              <a:t>Start Sprint 2</a:t>
-            </a:r>
-            <a:endParaRPr lang="en-US" sz="1600" dirty="0"/>
-          </a:p>
-        </p:txBody>
-      </p:sp>
-      <p:sp>
-        <p:nvSpPr>
-          <p:cNvPr id="17" name="Text 15"/>
-          <p:cNvSpPr/>
-          <p:nvPr/>
-        </p:nvSpPr>
-        <p:spPr>
-          <a:xfrm>
-            <a:off x="4434840" y="3977640"/>
-            <a:ext cx="6949440" cy="640080"/>
-          </a:xfrm>
-          <a:prstGeom prst="rect">
-            <a:avLst/>
-          </a:prstGeom>
-          <a:noFill/>
-          <a:ln/>
-        </p:spPr>
-        <p:txBody>
-          <a:bodyPr wrap="square" lIns="0" tIns="0" rIns="0" bIns="0" rtlCol="0" anchor="ctr"/>
-          <a:lstStyle/>
-          <a:p>
-            <a:pPr marL="0" indent="0">
-              <a:buNone/>
-            </a:pPr>
-            <a:r>
-              <a:rPr lang="en-US" sz="1300" dirty="0">
-                <a:solidFill>
-                  <a:srgbClr val="5B6472"/>
-                </a:solidFill>
-                <a:latin typeface="Calibri" pitchFamily="34" charset="0"/>
-                <a:ea typeface="Calibri" pitchFamily="34" charset="-122"/>
-                <a:cs typeface="Calibri" pitchFamily="34" charset="-120"/>
-              </a:rPr>
-              <a:t>Scheduling &amp; holds cluster begins 12 Aug, on the same 2-week cadence.</a:t>
-            </a:r>
-            <a:endParaRPr lang="en-US" sz="1300" dirty="0"/>
-          </a:p>
-        </p:txBody>
-      </p:sp>
-      <p:sp>
-        <p:nvSpPr>
-          <p:cNvPr id="18" name="Text 16"/>
-          <p:cNvSpPr/>
-          <p:nvPr/>
-        </p:nvSpPr>
-        <p:spPr>
-          <a:xfrm>
-            <a:off x="11505895" y="6400800"/>
-            <a:ext cx="457200" cy="274320"/>
-          </a:xfrm>
-          <a:prstGeom prst="rect">
-            <a:avLst/>
-          </a:prstGeom>
-          <a:noFill/>
-          <a:ln/>
-        </p:spPr>
-        <p:txBody>
-          <a:bodyPr wrap="square" lIns="0" tIns="0" rIns="0" bIns="0" rtlCol="0" anchor="ctr"/>
-          <a:lstStyle/>
-          <a:p>
-            <a:pPr marL="0" indent="0" algn="r">
-              <a:buNone/>
-            </a:pPr>
-            <a:r>
-              <a:rPr lang="en-US" sz="1000" dirty="0">
-                <a:solidFill>
-                  <a:srgbClr val="8A94A6"/>
-                </a:solidFill>
-                <a:latin typeface="Calibri" pitchFamily="34" charset="0"/>
-                <a:ea typeface="Calibri" pitchFamily="34" charset="-122"/>
-                <a:cs typeface="Calibri" pitchFamily="34" charset="-120"/>
-              </a:rPr>
-              <a:t>9</a:t>
-            </a:r>
-            <a:endParaRPr lang="en-US" sz="1000" dirty="0"/>
-          </a:p>
-        </p:txBody>
-      </p:sp>
-      <p:sp>
-        <p:nvSpPr>
-          <p:cNvPr id="19" name="Text 17"/>
           <p:cNvSpPr/>
           <p:nvPr/>
         </p:nvSpPr>
